--- a/docs/BayWatch-defence.pptx
+++ b/docs/BayWatch-defence.pptx
@@ -2,21 +2,21 @@
 <file path=ppt/presentation.xml><?xml version="1.0" encoding="utf-8"?>
 <p:presentation xmlns:p="http://schemas.openxmlformats.org/presentationml/2006/main">
   <p:sldMasterIdLst>
-    <p:sldMasterId xmlns:r="http://schemas.openxmlformats.org/officeDocument/2006/relationships" id="2147483648" r:id="Rea597394478e4662"/>
+    <p:sldMasterId xmlns:r="http://schemas.openxmlformats.org/officeDocument/2006/relationships" id="2147483648" r:id="R9055a6d7ba224ea8"/>
   </p:sldMasterIdLst>
   <p:notesMasterIdLst>
-    <p:notesMasterId xmlns:r="http://schemas.openxmlformats.org/officeDocument/2006/relationships" r:id="R6108448cd68d445b"/>
+    <p:notesMasterId xmlns:r="http://schemas.openxmlformats.org/officeDocument/2006/relationships" r:id="R40694421c1c94d12"/>
   </p:notesMasterIdLst>
   <p:sldIdLst>
-    <p:sldId xmlns:r="http://schemas.openxmlformats.org/officeDocument/2006/relationships" id="256" r:id="R6c02c22c52014a6f"/>
-    <p:sldId xmlns:r="http://schemas.openxmlformats.org/officeDocument/2006/relationships" id="257" r:id="R368bf0e54bff40a1"/>
-    <p:sldId xmlns:r="http://schemas.openxmlformats.org/officeDocument/2006/relationships" id="258" r:id="Ra99426605c184137"/>
-    <p:sldId xmlns:r="http://schemas.openxmlformats.org/officeDocument/2006/relationships" id="259" r:id="R8221a4f1f6ae42c6"/>
-    <p:sldId xmlns:r="http://schemas.openxmlformats.org/officeDocument/2006/relationships" id="260" r:id="Rb08a8262b6794375"/>
-    <p:sldId xmlns:r="http://schemas.openxmlformats.org/officeDocument/2006/relationships" id="261" r:id="Ra4a46ac4c75d4b69"/>
-    <p:sldId xmlns:r="http://schemas.openxmlformats.org/officeDocument/2006/relationships" id="262" r:id="Rd55e138c8c664fcc"/>
-    <p:sldId xmlns:r="http://schemas.openxmlformats.org/officeDocument/2006/relationships" id="263" r:id="R2c25a84738a94344"/>
-    <p:sldId xmlns:r="http://schemas.openxmlformats.org/officeDocument/2006/relationships" id="264" r:id="R81a2960a2ff34d2f"/>
+    <p:sldId xmlns:r="http://schemas.openxmlformats.org/officeDocument/2006/relationships" id="256" r:id="R72e03dfdd905404c"/>
+    <p:sldId xmlns:r="http://schemas.openxmlformats.org/officeDocument/2006/relationships" id="257" r:id="R1f3b448c635a467c"/>
+    <p:sldId xmlns:r="http://schemas.openxmlformats.org/officeDocument/2006/relationships" id="258" r:id="R0cd22a9025854a3b"/>
+    <p:sldId xmlns:r="http://schemas.openxmlformats.org/officeDocument/2006/relationships" id="259" r:id="R039f3572cecd4b79"/>
+    <p:sldId xmlns:r="http://schemas.openxmlformats.org/officeDocument/2006/relationships" id="260" r:id="Raccaf810f37244f5"/>
+    <p:sldId xmlns:r="http://schemas.openxmlformats.org/officeDocument/2006/relationships" id="261" r:id="R084ce300597a4f9e"/>
+    <p:sldId xmlns:r="http://schemas.openxmlformats.org/officeDocument/2006/relationships" id="262" r:id="R8b435afcd5964198"/>
+    <p:sldId xmlns:r="http://schemas.openxmlformats.org/officeDocument/2006/relationships" id="263" r:id="R5540a02e66e64c6d"/>
+    <p:sldId xmlns:r="http://schemas.openxmlformats.org/officeDocument/2006/relationships" id="264" r:id="Rf9b5d7bf5091484b"/>
   </p:sldIdLst>
   <p:sldSz cx="12192000" cy="6858000"/>
   <p:notesSz cx="6858000" cy="9144000"/>
@@ -590,7 +590,7 @@
           <a:lstStyle xmlns:a="http://schemas.openxmlformats.org/drawingml/2006/main"/>
           <a:p xmlns:a="http://schemas.openxmlformats.org/drawingml/2006/main">
             <a:r>
-              <a:t>1:00–3:00 (120 сек). Открыть сайт. 0–25 сек: текущий кадр, счётчики, время. 25–70: загрузить кадр жюри, обвести 1–2 парковочных места, анализировать. Не обещать надёжность на произвольном ракурсе. 70–95: в проверке модели затемнить статичный кадр; показать отказ. 95–110: восстановить и экспортировать отчёт. 110–120: вернуться к слайдам. Если интернет недоступен: локальный сервер из README и уже скачанный репозиторий. На фото нельзя утверждать длительность стоянки.</a:t>
+              <a:t>1:00–3:00 (120 сек). Показать настоящее видео Freezy Traffic, LIFEOFVIDS, CC BY 3.0: https://commons.wikimedia.org/wiki/File:Freezy_Traffic.webm. Остановить и перемотать видео. Загрузить своё фото или MP4 H.264: поиск машин стартует автоматически без зон. Показать порог уверенности и детальный проход по фрагментам. Объяснить, что маленькие и перекрытые машины могут пропускаться. Для состояния пустых парковочных мест нужен отдельный режим зон. Экспортировать JSON. Связь с эффектом диспетчера ещё требует пилота.</a:t>
             </a:r>
           </a:p>
         </p:txBody>
@@ -660,7 +660,7 @@
           <a:lstStyle xmlns:a="http://schemas.openxmlformats.org/drawingml/2006/main"/>
           <a:p xmlns:a="http://schemas.openxmlformats.org/drawingml/2006/main">
             <a:r>
-              <a:t>3:00–3:50 (50 сек). В отличие от общего распознавания автомобилей мы решаем более узкую задачу: занятость заранее заданного места. HOG описывает форму и контуры, цветовые статистики дополняют сигнал. 224 признака, 48 ReLU нейронов, один выход. Adam + L2, эпоха и температура по валидации. Нет платных API или скрытых запросов к LLM. Три наблюдения стабилизируют видео, неуверенность сбрасывает таймер. Код и тест Python/JS совпадения в репозитории. Источники: ml/train.py, dist/vision.js, tests/vision.test.js.</a:t>
+              <a:t>3:00–3:50 (50 сек). Автомобили на фото и видео ищет готовый сторонний COCO-SSD Lite MobileNet v2 через TensorFlow.js. Мы не обучали этот детектор. Модель и код находятся на нашем сайте, кадры не отправляются на сервер. Детальный режим анализирует кадр и четыре фрагмента, объединяя рамки. Собственная MLP решает другую задачу: занятость заранее заданного места. 224 признака HOG и цвета, 48 ReLU, один sigmoid. Размеры: около18MB детектор и233KiB occupancy. 14 автоматических тестов проверяют логику и совместимость, а не точность детектора. Источники: https://github.com/tensorflow/tfjs-models/tree/master/coco-ssd; ml/train.py; dist/detector.js; tests/.</a:t>
             </a:r>
           </a:p>
         </p:txBody>
@@ -730,7 +730,7 @@
           <a:lstStyle xmlns:a="http://schemas.openxmlformats.org/drawingml/2006/main"/>
           <a:p xmlns:a="http://schemas.openxmlformats.org/drawingml/2006/main">
             <a:r>
-              <a:t>3:50–4:35 (45 сек). 72/18/27 кадров и 3931/1007/1511 мест. Дни съёмки не пересекаются. F1 99.29, FP0 FN11; не говорите о гарантии отсутствия false positive. Кадры и места коррелируют. Baseline всегда свободно выбран по train:48.58 на test. При 20/80 покрытие98.94 точность принятых99.67; без quality gate. В отдельном исключении камеры worst84.46 на UFPR04. Это ограничивает переносимость и обосновывает пилот. Источники: dist/data/evaluation.json; dist/data/cross-camera.json; docs/dataset-manifest.json.</a:t>
+              <a:t>3:50–4:35 (45 сек). Эти метрики относятся только к собственной модели занятости заранее заданного места. Для детектора COCO-SSD мы не проводили benchmark точности. 72/18/27 кадров и 3931/1007/1511 мест. Дни съёмки не пересекаются. F1 99.29, FP0 FN11; не говорите о гарантии отсутствия false positive. Кадры и места коррелируют. Baseline всегда свободно выбран по train:48.58 на test. При 20/80 покрытие98.94 точность принятых99.67; без quality gate. В отдельном исключении камеры worst84.46 на UFPR04. Это ограничивает переносимость и обосновывает пилот. Источники: dist/data/evaluation.json; dist/data/cross-camera.json; docs/dataset-manifest.json.</a:t>
             </a:r>
           </a:p>
         </p:txBody>
@@ -800,7 +800,7 @@
           <a:lstStyle xmlns:a="http://schemas.openxmlformats.org/drawingml/2006/main"/>
           <a:p xmlns:a="http://schemas.openxmlformats.org/drawingml/2006/main">
             <a:r>
-              <a:t>4:35–5:10 (35 сек). Измерено на Apple M5 в браузере Codex, macOS26.4.1: первоначальный кадр100 зон занял13ms, другой запуск19ms. Это единичные наблюдения, не p95. Декодирование и отрисовка вне таймера. Видео опрашивается около1Hz. Ночь и реальные местные автомобили не проверены; погода отсутствует в зеркале. Темнота/пересвет/низкая детализация отсекаются эвристиками, не всеми видами сбоев. Статический браузер не заменяет промышленный edge appliance. Источники: работающий UI; README Performance and cost.</a:t>
+              <a:t>4:35–5:10 (35 сек). В браузере Codex на Apple M5 наблюдали58–127ms на один запуск детектора. Это отдельные значения интерфейса, не benchmark и не p95. Время загрузки модели, декодирования и отрисовки вне таймера. Для модели занятости ранее13–19ms на100зон. Детектор может пропускать мелкие автомобили: в одном кадре PKLot сверху нашли лишь2машины. Поэтому автоматический режим не обещает полноту или точное число свободных парковочных мест. Видео Freezy Traffic подтверждает работающий inference, но не измеренную точность. Ночь, локальные камеры и стабильность24/7 не проверены. Источники: текущий UI, dist/detector.js, README.</a:t>
             </a:r>
           </a:p>
         </p:txBody>
@@ -1057,7 +1057,7 @@
           <p:cNvPr id="3" name="Title">
             <a:extLst xmlns:a="http://schemas.openxmlformats.org/drawingml/2006/main">
               <a:ext uri="{FF2B5EF4-FFF2-40B4-BE49-F238E27FC236}">
-                <a16:creationId xmlns:a16="http://schemas.microsoft.com/office/drawing/2014/main" id="{FBF788E1-CFEC-48C5-8635-E0A7A516461A}"/>
+                <a16:creationId xmlns:a16="http://schemas.microsoft.com/office/drawing/2014/main" id="{F490CE19-E482-41E1-BFB1-DEB968203AAD}"/>
               </a:ext>
             </a:extLst>
           </p:cNvPr>
@@ -1214,7 +1214,7 @@
           <p:cNvPr id="2" name="Subtitle">
             <a:extLst xmlns:a="http://schemas.openxmlformats.org/drawingml/2006/main">
               <a:ext uri="{FF2B5EF4-FFF2-40B4-BE49-F238E27FC236}">
-                <a16:creationId xmlns:a16="http://schemas.microsoft.com/office/drawing/2014/main" id="{0D710F14-00C7-46F3-B371-E52DEFB83D6F}"/>
+                <a16:creationId xmlns:a16="http://schemas.microsoft.com/office/drawing/2014/main" id="{46B25F70-B42C-404E-BFBD-351C4965DABE}"/>
               </a:ext>
             </a:extLst>
           </p:cNvPr>
@@ -1388,7 +1388,7 @@
           <p:cNvPr id="2" name="Section title">
             <a:extLst xmlns:a="http://schemas.openxmlformats.org/drawingml/2006/main">
               <a:ext uri="{FF2B5EF4-FFF2-40B4-BE49-F238E27FC236}">
-                <a16:creationId xmlns:a16="http://schemas.microsoft.com/office/drawing/2014/main" id="{61503547-BD3E-4C56-AE73-7BE123765435}"/>
+                <a16:creationId xmlns:a16="http://schemas.microsoft.com/office/drawing/2014/main" id="{712E6745-F992-4AC0-BFC7-BD3166D41B13}"/>
               </a:ext>
             </a:extLst>
           </p:cNvPr>
@@ -1562,7 +1562,7 @@
           <p:cNvPr id="3" name="Title">
             <a:extLst xmlns:a="http://schemas.openxmlformats.org/drawingml/2006/main">
               <a:ext uri="{FF2B5EF4-FFF2-40B4-BE49-F238E27FC236}">
-                <a16:creationId xmlns:a16="http://schemas.microsoft.com/office/drawing/2014/main" id="{ACFB7E57-FF4F-417A-A743-2F73463D47F2}"/>
+                <a16:creationId xmlns:a16="http://schemas.microsoft.com/office/drawing/2014/main" id="{41B42F68-E5CC-4DA6-A312-2A6C894E3895}"/>
               </a:ext>
             </a:extLst>
           </p:cNvPr>
@@ -1719,7 +1719,7 @@
           <p:cNvPr id="2" name="Body">
             <a:extLst xmlns:a="http://schemas.openxmlformats.org/drawingml/2006/main">
               <a:ext uri="{FF2B5EF4-FFF2-40B4-BE49-F238E27FC236}">
-                <a16:creationId xmlns:a16="http://schemas.microsoft.com/office/drawing/2014/main" id="{A50C0F01-818E-452E-8369-764C2EE2329E}"/>
+                <a16:creationId xmlns:a16="http://schemas.microsoft.com/office/drawing/2014/main" id="{41F3004D-2D43-48F4-855C-A3A7EC2CDD87}"/>
               </a:ext>
             </a:extLst>
           </p:cNvPr>
@@ -1893,7 +1893,7 @@
           <p:cNvPr id="4" name="Title">
             <a:extLst xmlns:a="http://schemas.openxmlformats.org/drawingml/2006/main">
               <a:ext uri="{FF2B5EF4-FFF2-40B4-BE49-F238E27FC236}">
-                <a16:creationId xmlns:a16="http://schemas.microsoft.com/office/drawing/2014/main" id="{73A0D964-D622-413B-B5D3-183A81EAE0A4}"/>
+                <a16:creationId xmlns:a16="http://schemas.microsoft.com/office/drawing/2014/main" id="{77929EA2-D97C-4ABC-AE1C-83BD86E9E95A}"/>
               </a:ext>
             </a:extLst>
           </p:cNvPr>
@@ -2050,7 +2050,7 @@
           <p:cNvPr id="2" name="Left column">
             <a:extLst xmlns:a="http://schemas.openxmlformats.org/drawingml/2006/main">
               <a:ext uri="{FF2B5EF4-FFF2-40B4-BE49-F238E27FC236}">
-                <a16:creationId xmlns:a16="http://schemas.microsoft.com/office/drawing/2014/main" id="{D51225AC-0D8E-4653-86DA-F69E642C2678}"/>
+                <a16:creationId xmlns:a16="http://schemas.microsoft.com/office/drawing/2014/main" id="{D658F796-44E8-4B3E-94C6-C9710FB40CFF}"/>
               </a:ext>
             </a:extLst>
           </p:cNvPr>
@@ -2207,7 +2207,7 @@
           <p:cNvPr id="3" name="Right column">
             <a:extLst xmlns:a="http://schemas.openxmlformats.org/drawingml/2006/main">
               <a:ext uri="{FF2B5EF4-FFF2-40B4-BE49-F238E27FC236}">
-                <a16:creationId xmlns:a16="http://schemas.microsoft.com/office/drawing/2014/main" id="{63CCA7E4-CB1E-4C2F-BD2D-540352614683}"/>
+                <a16:creationId xmlns:a16="http://schemas.microsoft.com/office/drawing/2014/main" id="{A57A09D9-46C5-4C75-A123-121C864DE39A}"/>
               </a:ext>
             </a:extLst>
           </p:cNvPr>
@@ -2381,7 +2381,7 @@
           <p:cNvPr id="3" name="Title">
             <a:extLst xmlns:a="http://schemas.openxmlformats.org/drawingml/2006/main">
               <a:ext uri="{FF2B5EF4-FFF2-40B4-BE49-F238E27FC236}">
-                <a16:creationId xmlns:a16="http://schemas.microsoft.com/office/drawing/2014/main" id="{456F0654-9048-4250-964E-45471E0554AD}"/>
+                <a16:creationId xmlns:a16="http://schemas.microsoft.com/office/drawing/2014/main" id="{CC228C73-0AF4-4F9B-9CC9-665FB1AE1A43}"/>
               </a:ext>
             </a:extLst>
           </p:cNvPr>
@@ -2538,7 +2538,7 @@
           <p:cNvPr id="2" name="Left column">
             <a:extLst xmlns:a="http://schemas.openxmlformats.org/drawingml/2006/main">
               <a:ext uri="{FF2B5EF4-FFF2-40B4-BE49-F238E27FC236}">
-                <a16:creationId xmlns:a16="http://schemas.microsoft.com/office/drawing/2014/main" id="{C092EA00-C377-408B-BDB4-EE5570BA4289}"/>
+                <a16:creationId xmlns:a16="http://schemas.microsoft.com/office/drawing/2014/main" id="{8878639D-513F-43AF-84F2-F90938F1A028}"/>
               </a:ext>
             </a:extLst>
           </p:cNvPr>
@@ -2733,12 +2733,12 @@
   </p:cSld>
   <p:clrMap bg1="lt1" tx1="dk1" bg2="lt2" tx2="dk2" accent1="accent1" accent2="accent2" accent3="accent3" accent4="accent4" accent5="accent5" accent6="accent6" hlink="hlink" folHlink="folHlink"/>
   <p:sldLayoutIdLst>
-    <p:sldLayoutId xmlns:r="http://schemas.openxmlformats.org/officeDocument/2006/relationships" id="2147483649" r:id="Rf50dc8c362dc4a3d"/>
-    <p:sldLayoutId xmlns:r="http://schemas.openxmlformats.org/officeDocument/2006/relationships" id="2147483650" r:id="R78ef267bc8e34b34"/>
-    <p:sldLayoutId xmlns:r="http://schemas.openxmlformats.org/officeDocument/2006/relationships" id="2147483651" r:id="Ref6040fa85b9441e"/>
-    <p:sldLayoutId xmlns:r="http://schemas.openxmlformats.org/officeDocument/2006/relationships" id="2147483652" r:id="R3b2bd327d6d74f89"/>
-    <p:sldLayoutId xmlns:r="http://schemas.openxmlformats.org/officeDocument/2006/relationships" id="2147483653" r:id="Rd7f64687409c402e"/>
-    <p:sldLayoutId xmlns:r="http://schemas.openxmlformats.org/officeDocument/2006/relationships" id="2147483654" r:id="R9f078d8aff104a87"/>
+    <p:sldLayoutId xmlns:r="http://schemas.openxmlformats.org/officeDocument/2006/relationships" id="2147483649" r:id="R28d143152ac944ed"/>
+    <p:sldLayoutId xmlns:r="http://schemas.openxmlformats.org/officeDocument/2006/relationships" id="2147483650" r:id="Rab55383d16704261"/>
+    <p:sldLayoutId xmlns:r="http://schemas.openxmlformats.org/officeDocument/2006/relationships" id="2147483651" r:id="R00b2686bbd274ccc"/>
+    <p:sldLayoutId xmlns:r="http://schemas.openxmlformats.org/officeDocument/2006/relationships" id="2147483652" r:id="Radb09367e37f429c"/>
+    <p:sldLayoutId xmlns:r="http://schemas.openxmlformats.org/officeDocument/2006/relationships" id="2147483653" r:id="R6c1c63a413e44b66"/>
+    <p:sldLayoutId xmlns:r="http://schemas.openxmlformats.org/officeDocument/2006/relationships" id="2147483654" r:id="R9634b795d8ed40e4"/>
   </p:sldLayoutIdLst>
   <p:txStyles>
     <p:titleStyle>
@@ -3289,7 +3289,7 @@
           <p:cNvPr id="12" name="">
             <a:extLst xmlns:a="http://schemas.openxmlformats.org/drawingml/2006/main">
               <a:ext uri="{FF2B5EF4-FFF2-40B4-BE49-F238E27FC236}">
-                <a16:creationId xmlns:a16="http://schemas.microsoft.com/office/drawing/2014/main" id="{27A680B5-B6A6-4A64-BA7C-13E9DFDECC48}"/>
+                <a16:creationId xmlns:a16="http://schemas.microsoft.com/office/drawing/2014/main" id="{18F9362F-4E09-41F8-9D92-9B308CB11915}"/>
               </a:ext>
             </a:extLst>
           </p:cNvPr>
@@ -3319,7 +3319,7 @@
           <p:cNvPr id="2" name="">
             <a:extLst xmlns:a="http://schemas.openxmlformats.org/drawingml/2006/main">
               <a:ext uri="{FF2B5EF4-FFF2-40B4-BE49-F238E27FC236}">
-                <a16:creationId xmlns:a16="http://schemas.microsoft.com/office/drawing/2014/main" id="{88C04FE8-440C-4F19-8709-1405FF88C92E}"/>
+                <a16:creationId xmlns:a16="http://schemas.microsoft.com/office/drawing/2014/main" id="{BEDE6E6A-21F2-4007-837F-73DD31407E80}"/>
               </a:ext>
             </a:extLst>
           </p:cNvPr>
@@ -3385,7 +3385,7 @@
           <p:cNvPr id="3" name="">
             <a:extLst xmlns:a="http://schemas.openxmlformats.org/drawingml/2006/main">
               <a:ext uri="{FF2B5EF4-FFF2-40B4-BE49-F238E27FC236}">
-                <a16:creationId xmlns:a16="http://schemas.microsoft.com/office/drawing/2014/main" id="{4603C5D8-5D59-4EAD-957A-20410B8BCCB2}"/>
+                <a16:creationId xmlns:a16="http://schemas.microsoft.com/office/drawing/2014/main" id="{F0A46C68-7E0D-4FF2-9149-A858D74CCAB5}"/>
               </a:ext>
             </a:extLst>
           </p:cNvPr>
@@ -3451,7 +3451,7 @@
           <p:cNvPr id="4" name="">
             <a:extLst xmlns:a="http://schemas.openxmlformats.org/drawingml/2006/main">
               <a:ext uri="{FF2B5EF4-FFF2-40B4-BE49-F238E27FC236}">
-                <a16:creationId xmlns:a16="http://schemas.microsoft.com/office/drawing/2014/main" id="{D8A761D0-0FE4-4987-A4BD-F144029F6A45}"/>
+                <a16:creationId xmlns:a16="http://schemas.microsoft.com/office/drawing/2014/main" id="{7C6B032B-0910-47F9-8FE4-5B1220A858D7}"/>
               </a:ext>
             </a:extLst>
           </p:cNvPr>
@@ -3517,7 +3517,7 @@
           <p:cNvPr id="5" name="">
             <a:extLst xmlns:a="http://schemas.openxmlformats.org/drawingml/2006/main">
               <a:ext uri="{FF2B5EF4-FFF2-40B4-BE49-F238E27FC236}">
-                <a16:creationId xmlns:a16="http://schemas.microsoft.com/office/drawing/2014/main" id="{9D316552-0AEF-405E-A8FC-5E0459DB9419}"/>
+                <a16:creationId xmlns:a16="http://schemas.microsoft.com/office/drawing/2014/main" id="{57DBF477-AB55-4161-B4CE-6696603205C0}"/>
               </a:ext>
             </a:extLst>
           </p:cNvPr>
@@ -3583,7 +3583,7 @@
           <p:cNvPr id="6" name="">
             <a:extLst xmlns:a="http://schemas.openxmlformats.org/drawingml/2006/main">
               <a:ext uri="{FF2B5EF4-FFF2-40B4-BE49-F238E27FC236}">
-                <a16:creationId xmlns:a16="http://schemas.microsoft.com/office/drawing/2014/main" id="{F53B43D7-8D45-43DB-BD90-873EE2398743}"/>
+                <a16:creationId xmlns:a16="http://schemas.microsoft.com/office/drawing/2014/main" id="{104E0592-2BF7-4706-A606-DE2CF1179962}"/>
               </a:ext>
             </a:extLst>
           </p:cNvPr>
@@ -3672,7 +3672,7 @@
           <p:cNvPr id="7" name="">
             <a:extLst xmlns:a="http://schemas.openxmlformats.org/drawingml/2006/main">
               <a:ext uri="{FF2B5EF4-FFF2-40B4-BE49-F238E27FC236}">
-                <a16:creationId xmlns:a16="http://schemas.microsoft.com/office/drawing/2014/main" id="{97214D6A-AB90-44B4-9352-76B2DA2AB370}"/>
+                <a16:creationId xmlns:a16="http://schemas.microsoft.com/office/drawing/2014/main" id="{7948A5CC-8655-4901-BC66-F0CD92376A7F}"/>
               </a:ext>
             </a:extLst>
           </p:cNvPr>
@@ -3761,7 +3761,7 @@
           <p:cNvPr id="8" name="">
             <a:extLst xmlns:a="http://schemas.openxmlformats.org/drawingml/2006/main">
               <a:ext uri="{FF2B5EF4-FFF2-40B4-BE49-F238E27FC236}">
-                <a16:creationId xmlns:a16="http://schemas.microsoft.com/office/drawing/2014/main" id="{173FCCE9-1508-4D77-BA40-CC040C530DA9}"/>
+                <a16:creationId xmlns:a16="http://schemas.microsoft.com/office/drawing/2014/main" id="{9EF594D8-99CD-4301-9C23-A46BE2F339FA}"/>
               </a:ext>
             </a:extLst>
           </p:cNvPr>
@@ -3827,7 +3827,7 @@
           <p:cNvPr id="9" name="">
             <a:extLst xmlns:a="http://schemas.openxmlformats.org/drawingml/2006/main">
               <a:ext uri="{FF2B5EF4-FFF2-40B4-BE49-F238E27FC236}">
-                <a16:creationId xmlns:a16="http://schemas.microsoft.com/office/drawing/2014/main" id="{EF1CA28B-B4E7-4259-A810-B9CBD680543B}"/>
+                <a16:creationId xmlns:a16="http://schemas.microsoft.com/office/drawing/2014/main" id="{A908D9B7-CD24-4F23-A751-632A66A989AC}"/>
               </a:ext>
             </a:extLst>
           </p:cNvPr>
@@ -3837,7 +3837,7 @@
           <p:nvPr/>
         </p:nvPicPr>
         <p:blipFill>
-          <a:blip xmlns:r="http://schemas.openxmlformats.org/officeDocument/2006/relationships" xmlns:a="http://schemas.openxmlformats.org/drawingml/2006/main" r:embed="R267f518a1d884b3c"/>
+          <a:blip xmlns:r="http://schemas.openxmlformats.org/officeDocument/2006/relationships" xmlns:a="http://schemas.openxmlformats.org/drawingml/2006/main" r:embed="R8983a77cbf1d4b02"/>
           <a:stretch xmlns:a="http://schemas.openxmlformats.org/drawingml/2006/main"/>
         </p:blipFill>
         <p:spPr>
@@ -3855,7 +3855,7 @@
           <p:cNvPr id="10" name="">
             <a:extLst xmlns:a="http://schemas.openxmlformats.org/drawingml/2006/main">
               <a:ext uri="{FF2B5EF4-FFF2-40B4-BE49-F238E27FC236}">
-                <a16:creationId xmlns:a16="http://schemas.microsoft.com/office/drawing/2014/main" id="{351696E0-AD67-4364-98BA-B7944B66D202}"/>
+                <a16:creationId xmlns:a16="http://schemas.microsoft.com/office/drawing/2014/main" id="{F535A572-6DD3-4702-95C3-1118761678F5}"/>
               </a:ext>
             </a:extLst>
           </p:cNvPr>
@@ -3885,7 +3885,7 @@
           <p:cNvPr id="11" name="">
             <a:extLst xmlns:a="http://schemas.openxmlformats.org/drawingml/2006/main">
               <a:ext uri="{FF2B5EF4-FFF2-40B4-BE49-F238E27FC236}">
-                <a16:creationId xmlns:a16="http://schemas.microsoft.com/office/drawing/2014/main" id="{7F30144D-A338-4D47-9DB7-75F19FBC7C5C}"/>
+                <a16:creationId xmlns:a16="http://schemas.microsoft.com/office/drawing/2014/main" id="{72B29AA5-7DD6-4D27-B385-CA740DB70E0C}"/>
               </a:ext>
             </a:extLst>
           </p:cNvPr>
@@ -3949,7 +3949,7 @@
     </p:spTree>
     <p:extLst>
       <p:ext uri="{BB962C8B-B14F-4D97-AF65-F5344CB8AC3E}">
-        <p14:creationId xmlns:p14="http://schemas.microsoft.com/office/powerpoint/2010/main" val="259222320"/>
+        <p14:creationId xmlns:p14="http://schemas.microsoft.com/office/powerpoint/2010/main" val="1946618895"/>
       </p:ext>
     </p:extLst>
   </p:cSld>
@@ -3980,7 +3980,7 @@
           <p:cNvPr id="18" name="">
             <a:extLst xmlns:a="http://schemas.openxmlformats.org/drawingml/2006/main">
               <a:ext uri="{FF2B5EF4-FFF2-40B4-BE49-F238E27FC236}">
-                <a16:creationId xmlns:a16="http://schemas.microsoft.com/office/drawing/2014/main" id="{C68BBAA9-C915-4561-8BFC-B17737240495}"/>
+                <a16:creationId xmlns:a16="http://schemas.microsoft.com/office/drawing/2014/main" id="{6BB1C5ED-BDBA-4C6C-A3DB-DBFE76919E8A}"/>
               </a:ext>
             </a:extLst>
           </p:cNvPr>
@@ -4046,7 +4046,7 @@
           <p:cNvPr id="2" name="">
             <a:extLst xmlns:a="http://schemas.openxmlformats.org/drawingml/2006/main">
               <a:ext uri="{FF2B5EF4-FFF2-40B4-BE49-F238E27FC236}">
-                <a16:creationId xmlns:a16="http://schemas.microsoft.com/office/drawing/2014/main" id="{0AFF79C8-4BBD-4999-8674-6BC43D01AD03}"/>
+                <a16:creationId xmlns:a16="http://schemas.microsoft.com/office/drawing/2014/main" id="{D5C80BEC-8836-4053-AAAD-C4493C11045A}"/>
               </a:ext>
             </a:extLst>
           </p:cNvPr>
@@ -4076,7 +4076,7 @@
           <p:cNvPr id="3" name="">
             <a:extLst xmlns:a="http://schemas.openxmlformats.org/drawingml/2006/main">
               <a:ext uri="{FF2B5EF4-FFF2-40B4-BE49-F238E27FC236}">
-                <a16:creationId xmlns:a16="http://schemas.microsoft.com/office/drawing/2014/main" id="{D6AD122D-D864-45F8-9F49-B99C478ACFD5}"/>
+                <a16:creationId xmlns:a16="http://schemas.microsoft.com/office/drawing/2014/main" id="{30616C3D-E8AF-4293-92A3-5EBC7CF8A977}"/>
               </a:ext>
             </a:extLst>
           </p:cNvPr>
@@ -4142,7 +4142,7 @@
           <p:cNvPr id="4" name="">
             <a:extLst xmlns:a="http://schemas.openxmlformats.org/drawingml/2006/main">
               <a:ext uri="{FF2B5EF4-FFF2-40B4-BE49-F238E27FC236}">
-                <a16:creationId xmlns:a16="http://schemas.microsoft.com/office/drawing/2014/main" id="{AECBB696-DC26-42EB-9A56-191DFBB15D2B}"/>
+                <a16:creationId xmlns:a16="http://schemas.microsoft.com/office/drawing/2014/main" id="{69B6AFEE-985E-4B2B-BEDC-B597713E1030}"/>
               </a:ext>
             </a:extLst>
           </p:cNvPr>
@@ -4208,7 +4208,7 @@
           <p:cNvPr id="5" name="">
             <a:extLst xmlns:a="http://schemas.openxmlformats.org/drawingml/2006/main">
               <a:ext uri="{FF2B5EF4-FFF2-40B4-BE49-F238E27FC236}">
-                <a16:creationId xmlns:a16="http://schemas.microsoft.com/office/drawing/2014/main" id="{15E047F0-AE98-4355-98FD-3DA40EDDD68B}"/>
+                <a16:creationId xmlns:a16="http://schemas.microsoft.com/office/drawing/2014/main" id="{552C8D69-BBB1-4EED-8FEC-931EE81CB85D}"/>
               </a:ext>
             </a:extLst>
           </p:cNvPr>
@@ -4274,7 +4274,7 @@
           <p:cNvPr id="6" name="">
             <a:extLst xmlns:a="http://schemas.openxmlformats.org/drawingml/2006/main">
               <a:ext uri="{FF2B5EF4-FFF2-40B4-BE49-F238E27FC236}">
-                <a16:creationId xmlns:a16="http://schemas.microsoft.com/office/drawing/2014/main" id="{863100B5-3566-407F-811C-52CD7A7363E2}"/>
+                <a16:creationId xmlns:a16="http://schemas.microsoft.com/office/drawing/2014/main" id="{9653A1BF-BBD1-41B5-8550-0929E39F4C1D}"/>
               </a:ext>
             </a:extLst>
           </p:cNvPr>
@@ -4304,7 +4304,7 @@
           <p:cNvPr id="7" name="">
             <a:extLst xmlns:a="http://schemas.openxmlformats.org/drawingml/2006/main">
               <a:ext uri="{FF2B5EF4-FFF2-40B4-BE49-F238E27FC236}">
-                <a16:creationId xmlns:a16="http://schemas.microsoft.com/office/drawing/2014/main" id="{D1188706-D629-4479-92A1-1A15AB28F209}"/>
+                <a16:creationId xmlns:a16="http://schemas.microsoft.com/office/drawing/2014/main" id="{A81B75C7-9710-45F5-86E5-2C6DB598DBFA}"/>
               </a:ext>
             </a:extLst>
           </p:cNvPr>
@@ -4370,7 +4370,7 @@
           <p:cNvPr id="8" name="">
             <a:extLst xmlns:a="http://schemas.openxmlformats.org/drawingml/2006/main">
               <a:ext uri="{FF2B5EF4-FFF2-40B4-BE49-F238E27FC236}">
-                <a16:creationId xmlns:a16="http://schemas.microsoft.com/office/drawing/2014/main" id="{2C256475-5839-4A61-B7C3-FF10758C7F67}"/>
+                <a16:creationId xmlns:a16="http://schemas.microsoft.com/office/drawing/2014/main" id="{60041E03-A5EE-4179-A8EE-F05BE9ECEF48}"/>
               </a:ext>
             </a:extLst>
           </p:cNvPr>
@@ -4459,7 +4459,7 @@
           <p:cNvPr id="9" name="">
             <a:extLst xmlns:a="http://schemas.openxmlformats.org/drawingml/2006/main">
               <a:ext uri="{FF2B5EF4-FFF2-40B4-BE49-F238E27FC236}">
-                <a16:creationId xmlns:a16="http://schemas.microsoft.com/office/drawing/2014/main" id="{70A3A21C-6004-43FE-B4DD-F9F253C53BC6}"/>
+                <a16:creationId xmlns:a16="http://schemas.microsoft.com/office/drawing/2014/main" id="{0E8A79D8-6AD0-455C-9418-74D0EA450881}"/>
               </a:ext>
             </a:extLst>
           </p:cNvPr>
@@ -4525,7 +4525,7 @@
           <p:cNvPr id="10" name="">
             <a:extLst xmlns:a="http://schemas.openxmlformats.org/drawingml/2006/main">
               <a:ext uri="{FF2B5EF4-FFF2-40B4-BE49-F238E27FC236}">
-                <a16:creationId xmlns:a16="http://schemas.microsoft.com/office/drawing/2014/main" id="{AD0CBA96-16F4-4B8E-BFF4-BA33EEBE55BF}"/>
+                <a16:creationId xmlns:a16="http://schemas.microsoft.com/office/drawing/2014/main" id="{CE16BE88-A4AE-4D27-BB1C-7E5E648D202E}"/>
               </a:ext>
             </a:extLst>
           </p:cNvPr>
@@ -4555,7 +4555,7 @@
           <p:cNvPr id="11" name="">
             <a:extLst xmlns:a="http://schemas.openxmlformats.org/drawingml/2006/main">
               <a:ext uri="{FF2B5EF4-FFF2-40B4-BE49-F238E27FC236}">
-                <a16:creationId xmlns:a16="http://schemas.microsoft.com/office/drawing/2014/main" id="{4F756881-86C0-478B-A952-FCFC407CFD1C}"/>
+                <a16:creationId xmlns:a16="http://schemas.microsoft.com/office/drawing/2014/main" id="{43C85B7F-F472-42FF-82B5-5298C4ECC2FF}"/>
               </a:ext>
             </a:extLst>
           </p:cNvPr>
@@ -4621,7 +4621,7 @@
           <p:cNvPr id="12" name="">
             <a:extLst xmlns:a="http://schemas.openxmlformats.org/drawingml/2006/main">
               <a:ext uri="{FF2B5EF4-FFF2-40B4-BE49-F238E27FC236}">
-                <a16:creationId xmlns:a16="http://schemas.microsoft.com/office/drawing/2014/main" id="{73D8129D-9367-45EF-961F-6DC3330302B3}"/>
+                <a16:creationId xmlns:a16="http://schemas.microsoft.com/office/drawing/2014/main" id="{6057C7CA-FE92-4173-989E-12609ADD5510}"/>
               </a:ext>
             </a:extLst>
           </p:cNvPr>
@@ -4710,7 +4710,7 @@
           <p:cNvPr id="13" name="">
             <a:extLst xmlns:a="http://schemas.openxmlformats.org/drawingml/2006/main">
               <a:ext uri="{FF2B5EF4-FFF2-40B4-BE49-F238E27FC236}">
-                <a16:creationId xmlns:a16="http://schemas.microsoft.com/office/drawing/2014/main" id="{6B259984-6D53-4990-86C4-659346E6683E}"/>
+                <a16:creationId xmlns:a16="http://schemas.microsoft.com/office/drawing/2014/main" id="{7A5D7009-57F4-461B-9D01-2D80C5E5FFD5}"/>
               </a:ext>
             </a:extLst>
           </p:cNvPr>
@@ -4776,7 +4776,7 @@
           <p:cNvPr id="14" name="">
             <a:extLst xmlns:a="http://schemas.openxmlformats.org/drawingml/2006/main">
               <a:ext uri="{FF2B5EF4-FFF2-40B4-BE49-F238E27FC236}">
-                <a16:creationId xmlns:a16="http://schemas.microsoft.com/office/drawing/2014/main" id="{D59E9E71-1D20-45CD-9368-3EBD14905DD9}"/>
+                <a16:creationId xmlns:a16="http://schemas.microsoft.com/office/drawing/2014/main" id="{FDF7C550-006D-45A8-ABF4-4997C2891AF8}"/>
               </a:ext>
             </a:extLst>
           </p:cNvPr>
@@ -4806,7 +4806,7 @@
           <p:cNvPr id="15" name="">
             <a:extLst xmlns:a="http://schemas.openxmlformats.org/drawingml/2006/main">
               <a:ext uri="{FF2B5EF4-FFF2-40B4-BE49-F238E27FC236}">
-                <a16:creationId xmlns:a16="http://schemas.microsoft.com/office/drawing/2014/main" id="{0ED5771A-CF52-49AB-BF76-979686B5F404}"/>
+                <a16:creationId xmlns:a16="http://schemas.microsoft.com/office/drawing/2014/main" id="{CC9A9D58-E909-4A6B-BAEF-77CB4AE63729}"/>
               </a:ext>
             </a:extLst>
           </p:cNvPr>
@@ -4872,7 +4872,7 @@
           <p:cNvPr id="16" name="">
             <a:extLst xmlns:a="http://schemas.openxmlformats.org/drawingml/2006/main">
               <a:ext uri="{FF2B5EF4-FFF2-40B4-BE49-F238E27FC236}">
-                <a16:creationId xmlns:a16="http://schemas.microsoft.com/office/drawing/2014/main" id="{747E081E-03AC-4B25-BFEC-71A1F4A96B29}"/>
+                <a16:creationId xmlns:a16="http://schemas.microsoft.com/office/drawing/2014/main" id="{2231E995-A8B5-4667-B10C-453A3558D14B}"/>
               </a:ext>
             </a:extLst>
           </p:cNvPr>
@@ -4961,7 +4961,7 @@
           <p:cNvPr id="17" name="">
             <a:extLst xmlns:a="http://schemas.openxmlformats.org/drawingml/2006/main">
               <a:ext uri="{FF2B5EF4-FFF2-40B4-BE49-F238E27FC236}">
-                <a16:creationId xmlns:a16="http://schemas.microsoft.com/office/drawing/2014/main" id="{E6D05EC3-DBE9-42B7-8871-7A3850A29451}"/>
+                <a16:creationId xmlns:a16="http://schemas.microsoft.com/office/drawing/2014/main" id="{1DDF3A9A-A2B9-4B58-9BF2-75C6A3957537}"/>
               </a:ext>
             </a:extLst>
           </p:cNvPr>
@@ -5025,7 +5025,7 @@
     </p:spTree>
     <p:extLst>
       <p:ext uri="{BB962C8B-B14F-4D97-AF65-F5344CB8AC3E}">
-        <p14:creationId xmlns:p14="http://schemas.microsoft.com/office/powerpoint/2010/main" val="1987989532"/>
+        <p14:creationId xmlns:p14="http://schemas.microsoft.com/office/powerpoint/2010/main" val="1640634154"/>
       </p:ext>
     </p:extLst>
   </p:cSld>
@@ -5056,7 +5056,7 @@
           <p:cNvPr id="10" name="">
             <a:extLst xmlns:a="http://schemas.openxmlformats.org/drawingml/2006/main">
               <a:ext uri="{FF2B5EF4-FFF2-40B4-BE49-F238E27FC236}">
-                <a16:creationId xmlns:a16="http://schemas.microsoft.com/office/drawing/2014/main" id="{AD2F359D-F680-4A04-8624-8EE2A49BFB5B}"/>
+                <a16:creationId xmlns:a16="http://schemas.microsoft.com/office/drawing/2014/main" id="{4C28A311-5B02-476B-8AE2-5C03B1B0950F}"/>
               </a:ext>
             </a:extLst>
           </p:cNvPr>
@@ -5112,7 +5112,7 @@
                 <a:ea typeface="Helvetica Neue"/>
                 <a:cs typeface="Helvetica Neue"/>
               </a:rPr>
-              <a:t>Демо: кадр жюри → проверяемый результат</a:t>
+              <a:t>Демо: видео и автоматическое распознавание</a:t>
             </a:r>
           </a:p>
         </p:txBody>
@@ -5122,7 +5122,7 @@
           <p:cNvPr id="2" name="">
             <a:extLst xmlns:a="http://schemas.openxmlformats.org/drawingml/2006/main">
               <a:ext uri="{FF2B5EF4-FFF2-40B4-BE49-F238E27FC236}">
-                <a16:creationId xmlns:a16="http://schemas.microsoft.com/office/drawing/2014/main" id="{C1715124-5AEF-4A70-A06E-C8F712988215}"/>
+                <a16:creationId xmlns:a16="http://schemas.microsoft.com/office/drawing/2014/main" id="{06717FAE-0093-48F2-B0E8-18989512020D}"/>
               </a:ext>
             </a:extLst>
           </p:cNvPr>
@@ -5152,7 +5152,7 @@
           <p:cNvPr id="3" name="">
             <a:extLst xmlns:a="http://schemas.openxmlformats.org/drawingml/2006/main">
               <a:ext uri="{FF2B5EF4-FFF2-40B4-BE49-F238E27FC236}">
-                <a16:creationId xmlns:a16="http://schemas.microsoft.com/office/drawing/2014/main" id="{38DB4BF4-0ACE-41AF-8D63-645E46A963D7}"/>
+                <a16:creationId xmlns:a16="http://schemas.microsoft.com/office/drawing/2014/main" id="{2FE55897-02BC-4DF0-AD85-E4C2D2EEB697}"/>
               </a:ext>
             </a:extLst>
           </p:cNvPr>
@@ -5218,7 +5218,7 @@
           <p:cNvPr id="4" name="">
             <a:extLst xmlns:a="http://schemas.openxmlformats.org/drawingml/2006/main">
               <a:ext uri="{FF2B5EF4-FFF2-40B4-BE49-F238E27FC236}">
-                <a16:creationId xmlns:a16="http://schemas.microsoft.com/office/drawing/2014/main" id="{F2E44F44-E187-412E-A6AA-2F8B854C6A1F}"/>
+                <a16:creationId xmlns:a16="http://schemas.microsoft.com/office/drawing/2014/main" id="{558853FB-E011-4B25-ABA8-DA55A575E661}"/>
               </a:ext>
             </a:extLst>
           </p:cNvPr>
@@ -5284,7 +5284,7 @@
           <p:cNvPr id="5" name="">
             <a:extLst xmlns:a="http://schemas.openxmlformats.org/drawingml/2006/main">
               <a:ext uri="{FF2B5EF4-FFF2-40B4-BE49-F238E27FC236}">
-                <a16:creationId xmlns:a16="http://schemas.microsoft.com/office/drawing/2014/main" id="{796ABA71-902A-4DFC-8D92-EA03302DD7AA}"/>
+                <a16:creationId xmlns:a16="http://schemas.microsoft.com/office/drawing/2014/main" id="{75A2B482-DE06-41B6-8E03-91EB1E537B41}"/>
               </a:ext>
             </a:extLst>
           </p:cNvPr>
@@ -5294,7 +5294,7 @@
           <p:nvPr/>
         </p:nvPicPr>
         <p:blipFill>
-          <a:blip xmlns:r="http://schemas.openxmlformats.org/officeDocument/2006/relationships" xmlns:a="http://schemas.openxmlformats.org/drawingml/2006/main" r:embed="R25665fbc5df747d6"/>
+          <a:blip xmlns:r="http://schemas.openxmlformats.org/officeDocument/2006/relationships" xmlns:a="http://schemas.openxmlformats.org/drawingml/2006/main" r:embed="R4a9fb308ad6449d3"/>
           <a:stretch xmlns:a="http://schemas.openxmlformats.org/drawingml/2006/main"/>
         </p:blipFill>
         <p:spPr>
@@ -5312,7 +5312,7 @@
           <p:cNvPr id="6" name="">
             <a:extLst xmlns:a="http://schemas.openxmlformats.org/drawingml/2006/main">
               <a:ext uri="{FF2B5EF4-FFF2-40B4-BE49-F238E27FC236}">
-                <a16:creationId xmlns:a16="http://schemas.microsoft.com/office/drawing/2014/main" id="{39DE754C-F8FF-4AAA-87D0-F7ECC5D327DE}"/>
+                <a16:creationId xmlns:a16="http://schemas.microsoft.com/office/drawing/2014/main" id="{518A5347-5A9E-4F24-9091-6FECA0C0C175}"/>
               </a:ext>
             </a:extLst>
           </p:cNvPr>
@@ -5338,7 +5338,7 @@
           <a:bodyPr xmlns:a="http://schemas.openxmlformats.org/drawingml/2006/main"/>
           <a:lstStyle xmlns:a="http://schemas.openxmlformats.org/drawingml/2006/main">
             <a:defPPr>
-              <a:defRPr sz="2400" b="1">
+              <a:defRPr sz="2325" b="1">
                 <a:solidFill>
                   <a:srgbClr val="16382B"/>
                 </a:solidFill>
@@ -5350,7 +5350,7 @@
           </a:lstStyle>
           <a:p xmlns:a="http://schemas.openxmlformats.org/drawingml/2006/main">
             <a:pPr>
-              <a:defRPr sz="2400" b="1">
+              <a:defRPr sz="2325" b="1">
                 <a:solidFill>
                   <a:srgbClr val="16382B"/>
                 </a:solidFill>
@@ -5360,7 +5360,7 @@
               </a:defRPr>
             </a:pPr>
             <a:r>
-              <a:rPr sz="2400" b="1">
+              <a:rPr sz="2325" b="1">
                 <a:solidFill>
                   <a:srgbClr val="16382B"/>
                 </a:solidFill>
@@ -5368,7 +5368,7 @@
                 <a:ea typeface="Helvetica Neue"/>
                 <a:cs typeface="Helvetica Neue"/>
               </a:rPr>
-              <a:t>01  Загрузить свой кадр</a:t>
+              <a:t>01  Видео с реальным движением</a:t>
             </a:r>
           </a:p>
         </p:txBody>
@@ -5378,7 +5378,7 @@
           <p:cNvPr id="7" name="">
             <a:extLst xmlns:a="http://schemas.openxmlformats.org/drawingml/2006/main">
               <a:ext uri="{FF2B5EF4-FFF2-40B4-BE49-F238E27FC236}">
-                <a16:creationId xmlns:a16="http://schemas.microsoft.com/office/drawing/2014/main" id="{F48C2582-36E5-446A-BE99-77882CC6A5A0}"/>
+                <a16:creationId xmlns:a16="http://schemas.microsoft.com/office/drawing/2014/main" id="{7D8C6F6D-C7FC-4795-8685-7ABAE4514E07}"/>
               </a:ext>
             </a:extLst>
           </p:cNvPr>
@@ -5404,7 +5404,7 @@
           <a:bodyPr xmlns:a="http://schemas.openxmlformats.org/drawingml/2006/main"/>
           <a:lstStyle xmlns:a="http://schemas.openxmlformats.org/drawingml/2006/main">
             <a:defPPr>
-              <a:defRPr sz="2400" b="1">
+              <a:defRPr sz="2325" b="1">
                 <a:solidFill>
                   <a:srgbClr val="16382B"/>
                 </a:solidFill>
@@ -5416,7 +5416,7 @@
           </a:lstStyle>
           <a:p xmlns:a="http://schemas.openxmlformats.org/drawingml/2006/main">
             <a:pPr>
-              <a:defRPr sz="2400" b="1">
+              <a:defRPr sz="2325" b="1">
                 <a:solidFill>
                   <a:srgbClr val="16382B"/>
                 </a:solidFill>
@@ -5426,7 +5426,7 @@
               </a:defRPr>
             </a:pPr>
             <a:r>
-              <a:rPr sz="2400" b="1">
+              <a:rPr sz="2325" b="1">
                 <a:solidFill>
                   <a:srgbClr val="16382B"/>
                 </a:solidFill>
@@ -5434,7 +5434,7 @@
                 <a:ea typeface="Helvetica Neue"/>
                 <a:cs typeface="Helvetica Neue"/>
               </a:rPr>
-              <a:t>02  Обвести отдельные места</a:t>
+              <a:t>02  Свой файл без разметки</a:t>
             </a:r>
           </a:p>
         </p:txBody>
@@ -5444,7 +5444,7 @@
           <p:cNvPr id="8" name="">
             <a:extLst xmlns:a="http://schemas.openxmlformats.org/drawingml/2006/main">
               <a:ext uri="{FF2B5EF4-FFF2-40B4-BE49-F238E27FC236}">
-                <a16:creationId xmlns:a16="http://schemas.microsoft.com/office/drawing/2014/main" id="{87AF2FC9-B5AE-4A5C-8F52-3C1D3870E02F}"/>
+                <a16:creationId xmlns:a16="http://schemas.microsoft.com/office/drawing/2014/main" id="{50E1650B-1231-4A5F-8BCA-7D3821A84476}"/>
               </a:ext>
             </a:extLst>
           </p:cNvPr>
@@ -5470,7 +5470,7 @@
           <a:bodyPr xmlns:a="http://schemas.openxmlformats.org/drawingml/2006/main"/>
           <a:lstStyle xmlns:a="http://schemas.openxmlformats.org/drawingml/2006/main">
             <a:defPPr>
-              <a:defRPr sz="2400" b="1">
+              <a:defRPr sz="2325" b="1">
                 <a:solidFill>
                   <a:srgbClr val="16382B"/>
                 </a:solidFill>
@@ -5482,7 +5482,7 @@
           </a:lstStyle>
           <a:p xmlns:a="http://schemas.openxmlformats.org/drawingml/2006/main">
             <a:pPr>
-              <a:defRPr sz="2400" b="1">
+              <a:defRPr sz="2325" b="1">
                 <a:solidFill>
                   <a:srgbClr val="16382B"/>
                 </a:solidFill>
@@ -5492,7 +5492,7 @@
               </a:defRPr>
             </a:pPr>
             <a:r>
-              <a:rPr sz="2400" b="1">
+              <a:rPr sz="2325" b="1">
                 <a:solidFill>
                   <a:srgbClr val="16382B"/>
                 </a:solidFill>
@@ -5500,7 +5500,7 @@
                 <a:ea typeface="Helvetica Neue"/>
                 <a:cs typeface="Helvetica Neue"/>
               </a:rPr>
-              <a:t>03  Получить решение и JSON</a:t>
+              <a:t>03  Рамки машин и JSON</a:t>
             </a:r>
           </a:p>
         </p:txBody>
@@ -5510,7 +5510,7 @@
           <p:cNvPr id="9" name="">
             <a:extLst xmlns:a="http://schemas.openxmlformats.org/drawingml/2006/main">
               <a:ext uri="{FF2B5EF4-FFF2-40B4-BE49-F238E27FC236}">
-                <a16:creationId xmlns:a16="http://schemas.microsoft.com/office/drawing/2014/main" id="{5AE7CDE8-D9D6-4987-A357-BD451399F0A3}"/>
+                <a16:creationId xmlns:a16="http://schemas.microsoft.com/office/drawing/2014/main" id="{C63D3D3D-2463-4CDC-AF8A-C8D9F1275A1E}"/>
               </a:ext>
             </a:extLst>
           </p:cNvPr>
@@ -5566,7 +5566,7 @@
                 <a:ea typeface="Helvetica Neue"/>
                 <a:cs typeface="Helvetica Neue"/>
               </a:rPr>
-              <a:t>Затемнение должно приводить к проверке,</a:t>
+              <a:t>Пауза и перемотка для проверки.</a:t>
             </a:r>
           </a:p>
           <a:p xmlns:a="http://schemas.openxmlformats.org/drawingml/2006/main">
@@ -5589,7 +5589,7 @@
                 <a:ea typeface="Helvetica Neue"/>
                 <a:cs typeface="Helvetica Neue"/>
               </a:rPr>
-              <a:t>а не к уверенному ответу</a:t>
+              <a:t>Пустые места требуют карты зон.</a:t>
             </a:r>
           </a:p>
         </p:txBody>
@@ -5597,7 +5597,7 @@
     </p:spTree>
     <p:extLst>
       <p:ext uri="{BB962C8B-B14F-4D97-AF65-F5344CB8AC3E}">
-        <p14:creationId xmlns:p14="http://schemas.microsoft.com/office/powerpoint/2010/main" val="185020387"/>
+        <p14:creationId xmlns:p14="http://schemas.microsoft.com/office/powerpoint/2010/main" val="399958020"/>
       </p:ext>
     </p:extLst>
   </p:cSld>
@@ -5625,10 +5625,10 @@
       </p:grpSpPr>
       <p:sp>
         <p:nvSpPr>
-          <p:cNvPr id="23" name="">
-            <a:extLst xmlns:a="http://schemas.openxmlformats.org/drawingml/2006/main">
-              <a:ext uri="{FF2B5EF4-FFF2-40B4-BE49-F238E27FC236}">
-                <a16:creationId xmlns:a16="http://schemas.microsoft.com/office/drawing/2014/main" id="{504CB06D-E8AE-4F14-B4C8-BF0FC1A4BFEE}"/>
+          <p:cNvPr id="16" name="">
+            <a:extLst xmlns:a="http://schemas.openxmlformats.org/drawingml/2006/main">
+              <a:ext uri="{FF2B5EF4-FFF2-40B4-BE49-F238E27FC236}">
+                <a16:creationId xmlns:a16="http://schemas.microsoft.com/office/drawing/2014/main" id="{8AB606F8-EB84-471F-BC1E-53B8CD4E4A6C}"/>
               </a:ext>
             </a:extLst>
           </p:cNvPr>
@@ -5684,7 +5684,7 @@
                 <a:ea typeface="Helvetica Neue"/>
                 <a:cs typeface="Helvetica Neue"/>
               </a:rPr>
-              <a:t>Модель обучена с нуля и работает локально</a:t>
+              <a:t>Два режима распознавания в браузере</a:t>
             </a:r>
           </a:p>
         </p:txBody>
@@ -5694,7 +5694,7 @@
           <p:cNvPr id="2" name="">
             <a:extLst xmlns:a="http://schemas.openxmlformats.org/drawingml/2006/main">
               <a:ext uri="{FF2B5EF4-FFF2-40B4-BE49-F238E27FC236}">
-                <a16:creationId xmlns:a16="http://schemas.microsoft.com/office/drawing/2014/main" id="{CADD085D-F529-4EA8-ADE5-E51B50291752}"/>
+                <a16:creationId xmlns:a16="http://schemas.microsoft.com/office/drawing/2014/main" id="{458BFB24-3924-4932-A250-10354C0807DA}"/>
               </a:ext>
             </a:extLst>
           </p:cNvPr>
@@ -5724,7 +5724,7 @@
           <p:cNvPr id="3" name="">
             <a:extLst xmlns:a="http://schemas.openxmlformats.org/drawingml/2006/main">
               <a:ext uri="{FF2B5EF4-FFF2-40B4-BE49-F238E27FC236}">
-                <a16:creationId xmlns:a16="http://schemas.microsoft.com/office/drawing/2014/main" id="{878AFC7C-0D98-4302-9025-8B43CE8ACAFB}"/>
+                <a16:creationId xmlns:a16="http://schemas.microsoft.com/office/drawing/2014/main" id="{E13953AF-A234-466C-9394-33272DF2F1B2}"/>
               </a:ext>
             </a:extLst>
           </p:cNvPr>
@@ -5790,7 +5790,7 @@
           <p:cNvPr id="4" name="">
             <a:extLst xmlns:a="http://schemas.openxmlformats.org/drawingml/2006/main">
               <a:ext uri="{FF2B5EF4-FFF2-40B4-BE49-F238E27FC236}">
-                <a16:creationId xmlns:a16="http://schemas.microsoft.com/office/drawing/2014/main" id="{7E7F47C1-D833-4CD4-BB54-F7E536BA215D}"/>
+                <a16:creationId xmlns:a16="http://schemas.microsoft.com/office/drawing/2014/main" id="{775E2D32-AE3C-4956-9DC7-3B8513A48466}"/>
               </a:ext>
             </a:extLst>
           </p:cNvPr>
@@ -5856,7 +5856,7 @@
           <p:cNvPr id="5" name="">
             <a:extLst xmlns:a="http://schemas.openxmlformats.org/drawingml/2006/main">
               <a:ext uri="{FF2B5EF4-FFF2-40B4-BE49-F238E27FC236}">
-                <a16:creationId xmlns:a16="http://schemas.microsoft.com/office/drawing/2014/main" id="{3FCE7529-29AD-4F64-AC91-A83F21EAD322}"/>
+                <a16:creationId xmlns:a16="http://schemas.microsoft.com/office/drawing/2014/main" id="{2181E0A0-C0AE-4E50-8528-34C4FDF59A0A}"/>
               </a:ext>
             </a:extLst>
           </p:cNvPr>
@@ -5867,8 +5867,8 @@
         </p:nvSpPr>
         <p:spPr>
           <a:xfrm xmlns:a="http://schemas.openxmlformats.org/drawingml/2006/main">
-            <a:off x="609600" y="1914525"/>
-            <a:ext cx="2571750" cy="762000"/>
+            <a:off x="609600" y="1838325"/>
+            <a:ext cx="5429250" cy="523875"/>
           </a:xfrm>
           <a:prstGeom xmlns:a="http://schemas.openxmlformats.org/drawingml/2006/main" prst="rect">
             <a:avLst/>
@@ -5882,7 +5882,7 @@
           <a:bodyPr xmlns:a="http://schemas.openxmlformats.org/drawingml/2006/main"/>
           <a:lstStyle xmlns:a="http://schemas.openxmlformats.org/drawingml/2006/main">
             <a:defPPr>
-              <a:defRPr sz="3825" b="1">
+              <a:defRPr sz="2400" b="1">
                 <a:solidFill>
                   <a:srgbClr val="16664B"/>
                 </a:solidFill>
@@ -5894,7 +5894,7 @@
           </a:lstStyle>
           <a:p xmlns:a="http://schemas.openxmlformats.org/drawingml/2006/main">
             <a:pPr>
-              <a:defRPr sz="3825" b="1">
+              <a:defRPr sz="2400" b="1">
                 <a:solidFill>
                   <a:srgbClr val="16664B"/>
                 </a:solidFill>
@@ -5904,7 +5904,7 @@
               </a:defRPr>
             </a:pPr>
             <a:r>
-              <a:rPr sz="3825" b="1">
+              <a:rPr sz="2400" b="1">
                 <a:solidFill>
                   <a:srgbClr val="16664B"/>
                 </a:solidFill>
@@ -5912,7 +5912,7 @@
                 <a:ea typeface="Helvetica Neue"/>
                 <a:cs typeface="Helvetica Neue"/>
               </a:rPr>
-              <a:t>32×32</a:t>
+              <a:t>Автомобили без разметки</a:t>
             </a:r>
           </a:p>
         </p:txBody>
@@ -5922,7 +5922,7 @@
           <p:cNvPr id="6" name="">
             <a:extLst xmlns:a="http://schemas.openxmlformats.org/drawingml/2006/main">
               <a:ext uri="{FF2B5EF4-FFF2-40B4-BE49-F238E27FC236}">
-                <a16:creationId xmlns:a16="http://schemas.microsoft.com/office/drawing/2014/main" id="{504F26AA-78FD-4C2D-8CC9-B210319822FD}"/>
+                <a16:creationId xmlns:a16="http://schemas.microsoft.com/office/drawing/2014/main" id="{82FF9DF5-0E9D-49EF-8B8A-FAF0F760D499}"/>
               </a:ext>
             </a:extLst>
           </p:cNvPr>
@@ -5933,8 +5933,8 @@
         </p:nvSpPr>
         <p:spPr>
           <a:xfrm xmlns:a="http://schemas.openxmlformats.org/drawingml/2006/main">
-            <a:off x="609600" y="2781300"/>
-            <a:ext cx="2571750" cy="476250"/>
+            <a:off x="609600" y="2657475"/>
+            <a:ext cx="5372100" cy="866775"/>
           </a:xfrm>
           <a:prstGeom xmlns:a="http://schemas.openxmlformats.org/drawingml/2006/main" prst="rect">
             <a:avLst/>
@@ -5948,9 +5948,9 @@
           <a:bodyPr xmlns:a="http://schemas.openxmlformats.org/drawingml/2006/main"/>
           <a:lstStyle xmlns:a="http://schemas.openxmlformats.org/drawingml/2006/main">
             <a:defPPr>
-              <a:defRPr sz="1725" b="0">
-                <a:solidFill>
-                  <a:srgbClr val="6F8076"/>
+              <a:defRPr sz="2025" b="0">
+                <a:solidFill>
+                  <a:srgbClr val="16382B"/>
                 </a:solidFill>
                 <a:latin typeface="Helvetica Neue"/>
                 <a:ea typeface="Helvetica Neue"/>
@@ -5960,9 +5960,9 @@
           </a:lstStyle>
           <a:p xmlns:a="http://schemas.openxmlformats.org/drawingml/2006/main">
             <a:pPr>
-              <a:defRPr sz="1725" b="0">
-                <a:solidFill>
-                  <a:srgbClr val="6F8076"/>
+              <a:defRPr sz="2025" b="0">
+                <a:solidFill>
+                  <a:srgbClr val="16382B"/>
                 </a:solidFill>
                 <a:latin typeface="Helvetica Neue"/>
                 <a:ea typeface="Helvetica Neue"/>
@@ -5970,15 +5970,38 @@
               </a:defRPr>
             </a:pPr>
             <a:r>
-              <a:rPr sz="1725" b="0">
-                <a:solidFill>
-                  <a:srgbClr val="6F8076"/>
+              <a:rPr sz="2025" b="0">
+                <a:solidFill>
+                  <a:srgbClr val="16382B"/>
                 </a:solidFill>
                 <a:latin typeface="Helvetica Neue"/>
                 <a:ea typeface="Helvetica Neue"/>
                 <a:cs typeface="Helvetica Neue"/>
               </a:rPr>
-              <a:t>RGB-кроп места</a:t>
+              <a:t>Готовый COCO-SSD</a:t>
+            </a:r>
+          </a:p>
+          <a:p xmlns:a="http://schemas.openxmlformats.org/drawingml/2006/main">
+            <a:pPr>
+              <a:defRPr sz="2025" b="0">
+                <a:solidFill>
+                  <a:srgbClr val="16382B"/>
+                </a:solidFill>
+                <a:latin typeface="Helvetica Neue"/>
+                <a:ea typeface="Helvetica Neue"/>
+                <a:cs typeface="Helvetica Neue"/>
+              </a:defRPr>
+            </a:pPr>
+            <a:r>
+              <a:rPr sz="2025" b="0">
+                <a:solidFill>
+                  <a:srgbClr val="16382B"/>
+                </a:solidFill>
+                <a:latin typeface="Helvetica Neue"/>
+                <a:ea typeface="Helvetica Neue"/>
+                <a:cs typeface="Helvetica Neue"/>
+              </a:rPr>
+              <a:t>Lite MobileNet v2 / TensorFlow.js</a:t>
             </a:r>
           </a:p>
         </p:txBody>
@@ -5988,7 +6011,7 @@
           <p:cNvPr id="7" name="">
             <a:extLst xmlns:a="http://schemas.openxmlformats.org/drawingml/2006/main">
               <a:ext uri="{FF2B5EF4-FFF2-40B4-BE49-F238E27FC236}">
-                <a16:creationId xmlns:a16="http://schemas.microsoft.com/office/drawing/2014/main" id="{2C55585D-89BF-49F6-86DD-EBD541A37756}"/>
+                <a16:creationId xmlns:a16="http://schemas.microsoft.com/office/drawing/2014/main" id="{0761A28B-55CC-44E3-A2EA-54AE6878E884}"/>
               </a:ext>
             </a:extLst>
           </p:cNvPr>
@@ -5999,8 +6022,8 @@
         </p:nvSpPr>
         <p:spPr>
           <a:xfrm xmlns:a="http://schemas.openxmlformats.org/drawingml/2006/main">
-            <a:off x="3009900" y="2047875"/>
-            <a:ext cx="381000" cy="476250"/>
+            <a:off x="609600" y="3667125"/>
+            <a:ext cx="5381625" cy="419100"/>
           </a:xfrm>
           <a:prstGeom xmlns:a="http://schemas.openxmlformats.org/drawingml/2006/main" prst="rect">
             <a:avLst/>
@@ -6014,7 +6037,7 @@
           <a:bodyPr xmlns:a="http://schemas.openxmlformats.org/drawingml/2006/main"/>
           <a:lstStyle xmlns:a="http://schemas.openxmlformats.org/drawingml/2006/main">
             <a:defPPr>
-              <a:defRPr sz="2250" b="0">
+              <a:defRPr sz="1875" b="0">
                 <a:solidFill>
                   <a:srgbClr val="6F8076"/>
                 </a:solidFill>
@@ -6026,7 +6049,7 @@
           </a:lstStyle>
           <a:p xmlns:a="http://schemas.openxmlformats.org/drawingml/2006/main">
             <a:pPr>
-              <a:defRPr sz="2250" b="0">
+              <a:defRPr sz="1875" b="0">
                 <a:solidFill>
                   <a:srgbClr val="6F8076"/>
                 </a:solidFill>
@@ -6036,7 +6059,7 @@
               </a:defRPr>
             </a:pPr>
             <a:r>
-              <a:rPr sz="2250" b="0">
+              <a:rPr sz="1875" b="0">
                 <a:solidFill>
                   <a:srgbClr val="6F8076"/>
                 </a:solidFill>
@@ -6044,7 +6067,7 @@
                 <a:ea typeface="Helvetica Neue"/>
                 <a:cs typeface="Helvetica Neue"/>
               </a:rPr>
-              <a:t>→</a:t>
+              <a:t>Около 18 MB весов</a:t>
             </a:r>
           </a:p>
         </p:txBody>
@@ -6054,7 +6077,7 @@
           <p:cNvPr id="8" name="">
             <a:extLst xmlns:a="http://schemas.openxmlformats.org/drawingml/2006/main">
               <a:ext uri="{FF2B5EF4-FFF2-40B4-BE49-F238E27FC236}">
-                <a16:creationId xmlns:a16="http://schemas.microsoft.com/office/drawing/2014/main" id="{2D4E62F4-0928-43D8-BB4E-CF5F9C0E06A9}"/>
+                <a16:creationId xmlns:a16="http://schemas.microsoft.com/office/drawing/2014/main" id="{00DBB1A0-D28C-486F-9B4F-CD9A56EEA63D}"/>
               </a:ext>
             </a:extLst>
           </p:cNvPr>
@@ -6065,8 +6088,8 @@
         </p:nvSpPr>
         <p:spPr>
           <a:xfrm xmlns:a="http://schemas.openxmlformats.org/drawingml/2006/main">
-            <a:off x="3390900" y="1914525"/>
-            <a:ext cx="2571750" cy="762000"/>
+            <a:off x="6400800" y="1838325"/>
+            <a:ext cx="5181600" cy="523875"/>
           </a:xfrm>
           <a:prstGeom xmlns:a="http://schemas.openxmlformats.org/drawingml/2006/main" prst="rect">
             <a:avLst/>
@@ -6080,7 +6103,7 @@
           <a:bodyPr xmlns:a="http://schemas.openxmlformats.org/drawingml/2006/main"/>
           <a:lstStyle xmlns:a="http://schemas.openxmlformats.org/drawingml/2006/main">
             <a:defPPr>
-              <a:defRPr sz="3825" b="1">
+              <a:defRPr sz="2325" b="1">
                 <a:solidFill>
                   <a:srgbClr val="16664B"/>
                 </a:solidFill>
@@ -6092,7 +6115,7 @@
           </a:lstStyle>
           <a:p xmlns:a="http://schemas.openxmlformats.org/drawingml/2006/main">
             <a:pPr>
-              <a:defRPr sz="3825" b="1">
+              <a:defRPr sz="2325" b="1">
                 <a:solidFill>
                   <a:srgbClr val="16664B"/>
                 </a:solidFill>
@@ -6102,7 +6125,7 @@
               </a:defRPr>
             </a:pPr>
             <a:r>
-              <a:rPr sz="3825" b="1">
+              <a:rPr sz="2325" b="1">
                 <a:solidFill>
                   <a:srgbClr val="16664B"/>
                 </a:solidFill>
@@ -6110,7 +6133,7 @@
                 <a:ea typeface="Helvetica Neue"/>
                 <a:cs typeface="Helvetica Neue"/>
               </a:rPr>
-              <a:t>224</a:t>
+              <a:t>Занятость заданного места</a:t>
             </a:r>
           </a:p>
         </p:txBody>
@@ -6120,7 +6143,7 @@
           <p:cNvPr id="9" name="">
             <a:extLst xmlns:a="http://schemas.openxmlformats.org/drawingml/2006/main">
               <a:ext uri="{FF2B5EF4-FFF2-40B4-BE49-F238E27FC236}">
-                <a16:creationId xmlns:a16="http://schemas.microsoft.com/office/drawing/2014/main" id="{7F0317D8-B385-41BE-8CC7-9F48F84F11BD}"/>
+                <a16:creationId xmlns:a16="http://schemas.microsoft.com/office/drawing/2014/main" id="{0F4F0A86-03E0-46E2-B9A6-2C0FFC5A4683}"/>
               </a:ext>
             </a:extLst>
           </p:cNvPr>
@@ -6131,8 +6154,8 @@
         </p:nvSpPr>
         <p:spPr>
           <a:xfrm xmlns:a="http://schemas.openxmlformats.org/drawingml/2006/main">
-            <a:off x="3390900" y="2781300"/>
-            <a:ext cx="2571750" cy="476250"/>
+            <a:off x="6400800" y="2657475"/>
+            <a:ext cx="5181600" cy="866775"/>
           </a:xfrm>
           <a:prstGeom xmlns:a="http://schemas.openxmlformats.org/drawingml/2006/main" prst="rect">
             <a:avLst/>
@@ -6146,9 +6169,9 @@
           <a:bodyPr xmlns:a="http://schemas.openxmlformats.org/drawingml/2006/main"/>
           <a:lstStyle xmlns:a="http://schemas.openxmlformats.org/drawingml/2006/main">
             <a:defPPr>
-              <a:defRPr sz="1725" b="0">
-                <a:solidFill>
-                  <a:srgbClr val="6F8076"/>
+              <a:defRPr sz="1950" b="0">
+                <a:solidFill>
+                  <a:srgbClr val="16382B"/>
                 </a:solidFill>
                 <a:latin typeface="Helvetica Neue"/>
                 <a:ea typeface="Helvetica Neue"/>
@@ -6158,9 +6181,9 @@
           </a:lstStyle>
           <a:p xmlns:a="http://schemas.openxmlformats.org/drawingml/2006/main">
             <a:pPr>
-              <a:defRPr sz="1725" b="0">
-                <a:solidFill>
-                  <a:srgbClr val="6F8076"/>
+              <a:defRPr sz="1950" b="0">
+                <a:solidFill>
+                  <a:srgbClr val="16382B"/>
                 </a:solidFill>
                 <a:latin typeface="Helvetica Neue"/>
                 <a:ea typeface="Helvetica Neue"/>
@@ -6168,15 +6191,38 @@
               </a:defRPr>
             </a:pPr>
             <a:r>
-              <a:rPr sz="1725" b="0">
-                <a:solidFill>
-                  <a:srgbClr val="6F8076"/>
+              <a:rPr sz="1950" b="0">
+                <a:solidFill>
+                  <a:srgbClr val="16382B"/>
                 </a:solidFill>
                 <a:latin typeface="Helvetica Neue"/>
                 <a:ea typeface="Helvetica Neue"/>
                 <a:cs typeface="Helvetica Neue"/>
               </a:rPr>
-              <a:t>HOG + цвет</a:t>
+              <a:t>Собственная MLP</a:t>
+            </a:r>
+          </a:p>
+          <a:p xmlns:a="http://schemas.openxmlformats.org/drawingml/2006/main">
+            <a:pPr>
+              <a:defRPr sz="1950" b="0">
+                <a:solidFill>
+                  <a:srgbClr val="16382B"/>
+                </a:solidFill>
+                <a:latin typeface="Helvetica Neue"/>
+                <a:ea typeface="Helvetica Neue"/>
+                <a:cs typeface="Helvetica Neue"/>
+              </a:defRPr>
+            </a:pPr>
+            <a:r>
+              <a:rPr sz="1950" b="0">
+                <a:solidFill>
+                  <a:srgbClr val="16382B"/>
+                </a:solidFill>
+                <a:latin typeface="Helvetica Neue"/>
+                <a:ea typeface="Helvetica Neue"/>
+                <a:cs typeface="Helvetica Neue"/>
+              </a:rPr>
+              <a:t>224 признака, 48 нейронов, 1 выход</a:t>
             </a:r>
           </a:p>
         </p:txBody>
@@ -6186,7 +6232,7 @@
           <p:cNvPr id="10" name="">
             <a:extLst xmlns:a="http://schemas.openxmlformats.org/drawingml/2006/main">
               <a:ext uri="{FF2B5EF4-FFF2-40B4-BE49-F238E27FC236}">
-                <a16:creationId xmlns:a16="http://schemas.microsoft.com/office/drawing/2014/main" id="{9C8112FB-168E-468D-B177-F22338EA1D89}"/>
+                <a16:creationId xmlns:a16="http://schemas.microsoft.com/office/drawing/2014/main" id="{7C253C65-9918-418F-83F7-99847DFF3062}"/>
               </a:ext>
             </a:extLst>
           </p:cNvPr>
@@ -6197,8 +6243,8 @@
         </p:nvSpPr>
         <p:spPr>
           <a:xfrm xmlns:a="http://schemas.openxmlformats.org/drawingml/2006/main">
-            <a:off x="5791200" y="2047875"/>
-            <a:ext cx="381000" cy="476250"/>
+            <a:off x="6400800" y="3667125"/>
+            <a:ext cx="5181600" cy="419100"/>
           </a:xfrm>
           <a:prstGeom xmlns:a="http://schemas.openxmlformats.org/drawingml/2006/main" prst="rect">
             <a:avLst/>
@@ -6212,7 +6258,7 @@
           <a:bodyPr xmlns:a="http://schemas.openxmlformats.org/drawingml/2006/main"/>
           <a:lstStyle xmlns:a="http://schemas.openxmlformats.org/drawingml/2006/main">
             <a:defPPr>
-              <a:defRPr sz="2250" b="0">
+              <a:defRPr sz="1875" b="0">
                 <a:solidFill>
                   <a:srgbClr val="6F8076"/>
                 </a:solidFill>
@@ -6224,7 +6270,7 @@
           </a:lstStyle>
           <a:p xmlns:a="http://schemas.openxmlformats.org/drawingml/2006/main">
             <a:pPr>
-              <a:defRPr sz="2250" b="0">
+              <a:defRPr sz="1875" b="0">
                 <a:solidFill>
                   <a:srgbClr val="6F8076"/>
                 </a:solidFill>
@@ -6234,7 +6280,7 @@
               </a:defRPr>
             </a:pPr>
             <a:r>
-              <a:rPr sz="2250" b="0">
+              <a:rPr sz="1875" b="0">
                 <a:solidFill>
                   <a:srgbClr val="6F8076"/>
                 </a:solidFill>
@@ -6242,7 +6288,7 @@
                 <a:ea typeface="Helvetica Neue"/>
                 <a:cs typeface="Helvetica Neue"/>
               </a:rPr>
-              <a:t>→</a:t>
+              <a:t>233 KiB весов</a:t>
             </a:r>
           </a:p>
         </p:txBody>
@@ -6252,7 +6298,7 @@
           <p:cNvPr id="11" name="">
             <a:extLst xmlns:a="http://schemas.openxmlformats.org/drawingml/2006/main">
               <a:ext uri="{FF2B5EF4-FFF2-40B4-BE49-F238E27FC236}">
-                <a16:creationId xmlns:a16="http://schemas.microsoft.com/office/drawing/2014/main" id="{DB5FE19A-E9E5-45BE-BF18-3A88617A8695}"/>
+                <a16:creationId xmlns:a16="http://schemas.microsoft.com/office/drawing/2014/main" id="{08AD343B-D536-4704-8FA5-87FBEA116A02}"/>
               </a:ext>
             </a:extLst>
           </p:cNvPr>
@@ -6263,337 +6309,7 @@
         </p:nvSpPr>
         <p:spPr>
           <a:xfrm xmlns:a="http://schemas.openxmlformats.org/drawingml/2006/main">
-            <a:off x="6172200" y="1914525"/>
-            <a:ext cx="2571750" cy="762000"/>
-          </a:xfrm>
-          <a:prstGeom xmlns:a="http://schemas.openxmlformats.org/drawingml/2006/main" prst="rect">
-            <a:avLst/>
-          </a:prstGeom>
-          <a:noFill xmlns:a="http://schemas.openxmlformats.org/drawingml/2006/main"/>
-          <a:ln xmlns:a="http://schemas.openxmlformats.org/drawingml/2006/main" w="0">
-            <a:noFill/>
-          </a:ln>
-        </p:spPr>
-        <p:txBody>
-          <a:bodyPr xmlns:a="http://schemas.openxmlformats.org/drawingml/2006/main"/>
-          <a:lstStyle xmlns:a="http://schemas.openxmlformats.org/drawingml/2006/main">
-            <a:defPPr>
-              <a:defRPr sz="3825" b="1">
-                <a:solidFill>
-                  <a:srgbClr val="16664B"/>
-                </a:solidFill>
-                <a:latin typeface="Helvetica Neue"/>
-                <a:ea typeface="Helvetica Neue"/>
-                <a:cs typeface="Helvetica Neue"/>
-              </a:defRPr>
-            </a:defPPr>
-          </a:lstStyle>
-          <a:p xmlns:a="http://schemas.openxmlformats.org/drawingml/2006/main">
-            <a:pPr>
-              <a:defRPr sz="3825" b="1">
-                <a:solidFill>
-                  <a:srgbClr val="16664B"/>
-                </a:solidFill>
-                <a:latin typeface="Helvetica Neue"/>
-                <a:ea typeface="Helvetica Neue"/>
-                <a:cs typeface="Helvetica Neue"/>
-              </a:defRPr>
-            </a:pPr>
-            <a:r>
-              <a:rPr sz="3825" b="1">
-                <a:solidFill>
-                  <a:srgbClr val="16664B"/>
-                </a:solidFill>
-                <a:latin typeface="Helvetica Neue"/>
-                <a:ea typeface="Helvetica Neue"/>
-                <a:cs typeface="Helvetica Neue"/>
-              </a:rPr>
-              <a:t>48 → 1</a:t>
-            </a:r>
-          </a:p>
-        </p:txBody>
-      </p:sp>
-      <p:sp>
-        <p:nvSpPr>
-          <p:cNvPr id="12" name="">
-            <a:extLst xmlns:a="http://schemas.openxmlformats.org/drawingml/2006/main">
-              <a:ext uri="{FF2B5EF4-FFF2-40B4-BE49-F238E27FC236}">
-                <a16:creationId xmlns:a16="http://schemas.microsoft.com/office/drawing/2014/main" id="{FA11BE4B-0CCE-4196-AE07-A56020E6EF7F}"/>
-              </a:ext>
-            </a:extLst>
-          </p:cNvPr>
-          <p:cNvSpPr>
-            <a:spLocks xmlns:a="http://schemas.openxmlformats.org/drawingml/2006/main" noGrp="1"/>
-          </p:cNvSpPr>
-          <p:nvPr/>
-        </p:nvSpPr>
-        <p:spPr>
-          <a:xfrm xmlns:a="http://schemas.openxmlformats.org/drawingml/2006/main">
-            <a:off x="6172200" y="2781300"/>
-            <a:ext cx="2571750" cy="476250"/>
-          </a:xfrm>
-          <a:prstGeom xmlns:a="http://schemas.openxmlformats.org/drawingml/2006/main" prst="rect">
-            <a:avLst/>
-          </a:prstGeom>
-          <a:noFill xmlns:a="http://schemas.openxmlformats.org/drawingml/2006/main"/>
-          <a:ln xmlns:a="http://schemas.openxmlformats.org/drawingml/2006/main" w="0">
-            <a:noFill/>
-          </a:ln>
-        </p:spPr>
-        <p:txBody>
-          <a:bodyPr xmlns:a="http://schemas.openxmlformats.org/drawingml/2006/main"/>
-          <a:lstStyle xmlns:a="http://schemas.openxmlformats.org/drawingml/2006/main">
-            <a:defPPr>
-              <a:defRPr sz="1725" b="0">
-                <a:solidFill>
-                  <a:srgbClr val="6F8076"/>
-                </a:solidFill>
-                <a:latin typeface="Helvetica Neue"/>
-                <a:ea typeface="Helvetica Neue"/>
-                <a:cs typeface="Helvetica Neue"/>
-              </a:defRPr>
-            </a:defPPr>
-          </a:lstStyle>
-          <a:p xmlns:a="http://schemas.openxmlformats.org/drawingml/2006/main">
-            <a:pPr>
-              <a:defRPr sz="1725" b="0">
-                <a:solidFill>
-                  <a:srgbClr val="6F8076"/>
-                </a:solidFill>
-                <a:latin typeface="Helvetica Neue"/>
-                <a:ea typeface="Helvetica Neue"/>
-                <a:cs typeface="Helvetica Neue"/>
-              </a:defRPr>
-            </a:pPr>
-            <a:r>
-              <a:rPr sz="1725" b="0">
-                <a:solidFill>
-                  <a:srgbClr val="6F8076"/>
-                </a:solidFill>
-                <a:latin typeface="Helvetica Neue"/>
-                <a:ea typeface="Helvetica Neue"/>
-                <a:cs typeface="Helvetica Neue"/>
-              </a:rPr>
-              <a:t>ReLU → sigmoid</a:t>
-            </a:r>
-          </a:p>
-        </p:txBody>
-      </p:sp>
-      <p:sp>
-        <p:nvSpPr>
-          <p:cNvPr id="13" name="">
-            <a:extLst xmlns:a="http://schemas.openxmlformats.org/drawingml/2006/main">
-              <a:ext uri="{FF2B5EF4-FFF2-40B4-BE49-F238E27FC236}">
-                <a16:creationId xmlns:a16="http://schemas.microsoft.com/office/drawing/2014/main" id="{DC8E86C2-D671-42D7-86C5-57A929752183}"/>
-              </a:ext>
-            </a:extLst>
-          </p:cNvPr>
-          <p:cNvSpPr>
-            <a:spLocks xmlns:a="http://schemas.openxmlformats.org/drawingml/2006/main" noGrp="1"/>
-          </p:cNvSpPr>
-          <p:nvPr/>
-        </p:nvSpPr>
-        <p:spPr>
-          <a:xfrm xmlns:a="http://schemas.openxmlformats.org/drawingml/2006/main">
-            <a:off x="8572500" y="2047875"/>
-            <a:ext cx="381000" cy="476250"/>
-          </a:xfrm>
-          <a:prstGeom xmlns:a="http://schemas.openxmlformats.org/drawingml/2006/main" prst="rect">
-            <a:avLst/>
-          </a:prstGeom>
-          <a:noFill xmlns:a="http://schemas.openxmlformats.org/drawingml/2006/main"/>
-          <a:ln xmlns:a="http://schemas.openxmlformats.org/drawingml/2006/main" w="0">
-            <a:noFill/>
-          </a:ln>
-        </p:spPr>
-        <p:txBody>
-          <a:bodyPr xmlns:a="http://schemas.openxmlformats.org/drawingml/2006/main"/>
-          <a:lstStyle xmlns:a="http://schemas.openxmlformats.org/drawingml/2006/main">
-            <a:defPPr>
-              <a:defRPr sz="2250" b="0">
-                <a:solidFill>
-                  <a:srgbClr val="6F8076"/>
-                </a:solidFill>
-                <a:latin typeface="Helvetica Neue"/>
-                <a:ea typeface="Helvetica Neue"/>
-                <a:cs typeface="Helvetica Neue"/>
-              </a:defRPr>
-            </a:defPPr>
-          </a:lstStyle>
-          <a:p xmlns:a="http://schemas.openxmlformats.org/drawingml/2006/main">
-            <a:pPr>
-              <a:defRPr sz="2250" b="0">
-                <a:solidFill>
-                  <a:srgbClr val="6F8076"/>
-                </a:solidFill>
-                <a:latin typeface="Helvetica Neue"/>
-                <a:ea typeface="Helvetica Neue"/>
-                <a:cs typeface="Helvetica Neue"/>
-              </a:defRPr>
-            </a:pPr>
-            <a:r>
-              <a:rPr sz="2250" b="0">
-                <a:solidFill>
-                  <a:srgbClr val="6F8076"/>
-                </a:solidFill>
-                <a:latin typeface="Helvetica Neue"/>
-                <a:ea typeface="Helvetica Neue"/>
-                <a:cs typeface="Helvetica Neue"/>
-              </a:rPr>
-              <a:t>→</a:t>
-            </a:r>
-          </a:p>
-        </p:txBody>
-      </p:sp>
-      <p:sp>
-        <p:nvSpPr>
-          <p:cNvPr id="14" name="">
-            <a:extLst xmlns:a="http://schemas.openxmlformats.org/drawingml/2006/main">
-              <a:ext uri="{FF2B5EF4-FFF2-40B4-BE49-F238E27FC236}">
-                <a16:creationId xmlns:a16="http://schemas.microsoft.com/office/drawing/2014/main" id="{B6B3B6F9-3FBF-467E-B3FF-A29EDD704B4F}"/>
-              </a:ext>
-            </a:extLst>
-          </p:cNvPr>
-          <p:cNvSpPr>
-            <a:spLocks xmlns:a="http://schemas.openxmlformats.org/drawingml/2006/main" noGrp="1"/>
-          </p:cNvSpPr>
-          <p:nvPr/>
-        </p:nvSpPr>
-        <p:spPr>
-          <a:xfrm xmlns:a="http://schemas.openxmlformats.org/drawingml/2006/main">
-            <a:off x="8953500" y="1914525"/>
-            <a:ext cx="2571750" cy="762000"/>
-          </a:xfrm>
-          <a:prstGeom xmlns:a="http://schemas.openxmlformats.org/drawingml/2006/main" prst="rect">
-            <a:avLst/>
-          </a:prstGeom>
-          <a:noFill xmlns:a="http://schemas.openxmlformats.org/drawingml/2006/main"/>
-          <a:ln xmlns:a="http://schemas.openxmlformats.org/drawingml/2006/main" w="0">
-            <a:noFill/>
-          </a:ln>
-        </p:spPr>
-        <p:txBody>
-          <a:bodyPr xmlns:a="http://schemas.openxmlformats.org/drawingml/2006/main"/>
-          <a:lstStyle xmlns:a="http://schemas.openxmlformats.org/drawingml/2006/main">
-            <a:defPPr>
-              <a:defRPr sz="3825" b="1">
-                <a:solidFill>
-                  <a:srgbClr val="16664B"/>
-                </a:solidFill>
-                <a:latin typeface="Helvetica Neue"/>
-                <a:ea typeface="Helvetica Neue"/>
-                <a:cs typeface="Helvetica Neue"/>
-              </a:defRPr>
-            </a:defPPr>
-          </a:lstStyle>
-          <a:p xmlns:a="http://schemas.openxmlformats.org/drawingml/2006/main">
-            <a:pPr>
-              <a:defRPr sz="3825" b="1">
-                <a:solidFill>
-                  <a:srgbClr val="16664B"/>
-                </a:solidFill>
-                <a:latin typeface="Helvetica Neue"/>
-                <a:ea typeface="Helvetica Neue"/>
-                <a:cs typeface="Helvetica Neue"/>
-              </a:defRPr>
-            </a:pPr>
-            <a:r>
-              <a:rPr sz="3825" b="1">
-                <a:solidFill>
-                  <a:srgbClr val="16664B"/>
-                </a:solidFill>
-                <a:latin typeface="Helvetica Neue"/>
-                <a:ea typeface="Helvetica Neue"/>
-                <a:cs typeface="Helvetica Neue"/>
-              </a:rPr>
-              <a:t>3 кадра</a:t>
-            </a:r>
-          </a:p>
-        </p:txBody>
-      </p:sp>
-      <p:sp>
-        <p:nvSpPr>
-          <p:cNvPr id="15" name="">
-            <a:extLst xmlns:a="http://schemas.openxmlformats.org/drawingml/2006/main">
-              <a:ext uri="{FF2B5EF4-FFF2-40B4-BE49-F238E27FC236}">
-                <a16:creationId xmlns:a16="http://schemas.microsoft.com/office/drawing/2014/main" id="{B8503842-DECC-411C-8FF3-65A7021A455B}"/>
-              </a:ext>
-            </a:extLst>
-          </p:cNvPr>
-          <p:cNvSpPr>
-            <a:spLocks xmlns:a="http://schemas.openxmlformats.org/drawingml/2006/main" noGrp="1"/>
-          </p:cNvSpPr>
-          <p:nvPr/>
-        </p:nvSpPr>
-        <p:spPr>
-          <a:xfrm xmlns:a="http://schemas.openxmlformats.org/drawingml/2006/main">
-            <a:off x="8953500" y="2781300"/>
-            <a:ext cx="2571750" cy="476250"/>
-          </a:xfrm>
-          <a:prstGeom xmlns:a="http://schemas.openxmlformats.org/drawingml/2006/main" prst="rect">
-            <a:avLst/>
-          </a:prstGeom>
-          <a:noFill xmlns:a="http://schemas.openxmlformats.org/drawingml/2006/main"/>
-          <a:ln xmlns:a="http://schemas.openxmlformats.org/drawingml/2006/main" w="0">
-            <a:noFill/>
-          </a:ln>
-        </p:spPr>
-        <p:txBody>
-          <a:bodyPr xmlns:a="http://schemas.openxmlformats.org/drawingml/2006/main"/>
-          <a:lstStyle xmlns:a="http://schemas.openxmlformats.org/drawingml/2006/main">
-            <a:defPPr>
-              <a:defRPr sz="1725" b="0">
-                <a:solidFill>
-                  <a:srgbClr val="6F8076"/>
-                </a:solidFill>
-                <a:latin typeface="Helvetica Neue"/>
-                <a:ea typeface="Helvetica Neue"/>
-                <a:cs typeface="Helvetica Neue"/>
-              </a:defRPr>
-            </a:defPPr>
-          </a:lstStyle>
-          <a:p xmlns:a="http://schemas.openxmlformats.org/drawingml/2006/main">
-            <a:pPr>
-              <a:defRPr sz="1725" b="0">
-                <a:solidFill>
-                  <a:srgbClr val="6F8076"/>
-                </a:solidFill>
-                <a:latin typeface="Helvetica Neue"/>
-                <a:ea typeface="Helvetica Neue"/>
-                <a:cs typeface="Helvetica Neue"/>
-              </a:defRPr>
-            </a:pPr>
-            <a:r>
-              <a:rPr sz="1725" b="0">
-                <a:solidFill>
-                  <a:srgbClr val="6F8076"/>
-                </a:solidFill>
-                <a:latin typeface="Helvetica Neue"/>
-                <a:ea typeface="Helvetica Neue"/>
-                <a:cs typeface="Helvetica Neue"/>
-              </a:rPr>
-              <a:t>Подтверждение</a:t>
-            </a:r>
-          </a:p>
-        </p:txBody>
-      </p:sp>
-      <p:sp>
-        <p:nvSpPr>
-          <p:cNvPr id="16" name="">
-            <a:extLst xmlns:a="http://schemas.openxmlformats.org/drawingml/2006/main">
-              <a:ext uri="{FF2B5EF4-FFF2-40B4-BE49-F238E27FC236}">
-                <a16:creationId xmlns:a16="http://schemas.microsoft.com/office/drawing/2014/main" id="{7B4A7C03-9890-4741-B0DB-1705A64F387F}"/>
-              </a:ext>
-            </a:extLst>
-          </p:cNvPr>
-          <p:cNvSpPr>
-            <a:spLocks xmlns:a="http://schemas.openxmlformats.org/drawingml/2006/main" noGrp="1"/>
-          </p:cNvSpPr>
-          <p:nvPr/>
-        </p:nvSpPr>
-        <p:spPr>
-          <a:xfrm xmlns:a="http://schemas.openxmlformats.org/drawingml/2006/main">
-            <a:off x="609600" y="3743325"/>
+            <a:off x="609600" y="4400550"/>
             <a:ext cx="10972800" cy="19050"/>
           </a:xfrm>
           <a:prstGeom xmlns:a="http://schemas.openxmlformats.org/drawingml/2006/main" prst="rect">
@@ -6609,10 +6325,10 @@
       </p:sp>
       <p:sp>
         <p:nvSpPr>
-          <p:cNvPr id="17" name="">
-            <a:extLst xmlns:a="http://schemas.openxmlformats.org/drawingml/2006/main">
-              <a:ext uri="{FF2B5EF4-FFF2-40B4-BE49-F238E27FC236}">
-                <a16:creationId xmlns:a16="http://schemas.microsoft.com/office/drawing/2014/main" id="{AF2F1922-7AB7-4B40-AF81-46289E9B13B6}"/>
+          <p:cNvPr id="12" name="">
+            <a:extLst xmlns:a="http://schemas.openxmlformats.org/drawingml/2006/main">
+              <a:ext uri="{FF2B5EF4-FFF2-40B4-BE49-F238E27FC236}">
+                <a16:creationId xmlns:a16="http://schemas.microsoft.com/office/drawing/2014/main" id="{35773397-5693-4463-AE68-884867B50530}"/>
               </a:ext>
             </a:extLst>
           </p:cNvPr>
@@ -6623,8 +6339,8 @@
         </p:nvSpPr>
         <p:spPr>
           <a:xfrm xmlns:a="http://schemas.openxmlformats.org/drawingml/2006/main">
-            <a:off x="609600" y="4191000"/>
-            <a:ext cx="2952750" cy="666750"/>
+            <a:off x="609600" y="4838700"/>
+            <a:ext cx="5105400" cy="609600"/>
           </a:xfrm>
           <a:prstGeom xmlns:a="http://schemas.openxmlformats.org/drawingml/2006/main" prst="rect">
             <a:avLst/>
@@ -6638,7 +6354,7 @@
           <a:bodyPr xmlns:a="http://schemas.openxmlformats.org/drawingml/2006/main"/>
           <a:lstStyle xmlns:a="http://schemas.openxmlformats.org/drawingml/2006/main">
             <a:defPPr>
-              <a:defRPr sz="3450" b="1">
+              <a:defRPr sz="3150" b="1">
                 <a:solidFill>
                   <a:srgbClr val="16382B"/>
                 </a:solidFill>
@@ -6650,7 +6366,7 @@
           </a:lstStyle>
           <a:p xmlns:a="http://schemas.openxmlformats.org/drawingml/2006/main">
             <a:pPr>
-              <a:defRPr sz="3450" b="1">
+              <a:defRPr sz="3150" b="1">
                 <a:solidFill>
                   <a:srgbClr val="16382B"/>
                 </a:solidFill>
@@ -6660,7 +6376,7 @@
               </a:defRPr>
             </a:pPr>
             <a:r>
-              <a:rPr sz="3450" b="1">
+              <a:rPr sz="3150" b="1">
                 <a:solidFill>
                   <a:srgbClr val="16382B"/>
                 </a:solidFill>
@@ -6668,17 +6384,17 @@
                 <a:ea typeface="Helvetica Neue"/>
                 <a:cs typeface="Helvetica Neue"/>
               </a:rPr>
-              <a:t>233 KiB</a:t>
-            </a:r>
-          </a:p>
-        </p:txBody>
-      </p:sp>
-      <p:sp>
-        <p:nvSpPr>
-          <p:cNvPr id="18" name="">
-            <a:extLst xmlns:a="http://schemas.openxmlformats.org/drawingml/2006/main">
-              <a:ext uri="{FF2B5EF4-FFF2-40B4-BE49-F238E27FC236}">
-                <a16:creationId xmlns:a16="http://schemas.microsoft.com/office/drawing/2014/main" id="{B09F4863-0CC7-4AF2-AFF9-183DD3ED84BC}"/>
+              <a:t>14 / 14 тестов</a:t>
+            </a:r>
+          </a:p>
+        </p:txBody>
+      </p:sp>
+      <p:sp>
+        <p:nvSpPr>
+          <p:cNvPr id="13" name="">
+            <a:extLst xmlns:a="http://schemas.openxmlformats.org/drawingml/2006/main">
+              <a:ext uri="{FF2B5EF4-FFF2-40B4-BE49-F238E27FC236}">
+                <a16:creationId xmlns:a16="http://schemas.microsoft.com/office/drawing/2014/main" id="{E11C3898-D140-4A40-B242-F1DFDA012B13}"/>
               </a:ext>
             </a:extLst>
           </p:cNvPr>
@@ -6689,8 +6405,8 @@
         </p:nvSpPr>
         <p:spPr>
           <a:xfrm xmlns:a="http://schemas.openxmlformats.org/drawingml/2006/main">
-            <a:off x="609600" y="4943475"/>
-            <a:ext cx="2952750" cy="428625"/>
+            <a:off x="6400800" y="4905375"/>
+            <a:ext cx="5181600" cy="504825"/>
           </a:xfrm>
           <a:prstGeom xmlns:a="http://schemas.openxmlformats.org/drawingml/2006/main" prst="rect">
             <a:avLst/>
@@ -6704,9 +6420,9 @@
           <a:bodyPr xmlns:a="http://schemas.openxmlformats.org/drawingml/2006/main"/>
           <a:lstStyle xmlns:a="http://schemas.openxmlformats.org/drawingml/2006/main">
             <a:defPPr>
-              <a:defRPr sz="1875" b="0">
-                <a:solidFill>
-                  <a:srgbClr val="6F8076"/>
+              <a:defRPr sz="2100" b="1">
+                <a:solidFill>
+                  <a:srgbClr val="16382B"/>
                 </a:solidFill>
                 <a:latin typeface="Helvetica Neue"/>
                 <a:ea typeface="Helvetica Neue"/>
@@ -6716,9 +6432,9 @@
           </a:lstStyle>
           <a:p xmlns:a="http://schemas.openxmlformats.org/drawingml/2006/main">
             <a:pPr>
-              <a:defRPr sz="1875" b="0">
-                <a:solidFill>
-                  <a:srgbClr val="6F8076"/>
+              <a:defRPr sz="2100" b="1">
+                <a:solidFill>
+                  <a:srgbClr val="16382B"/>
                 </a:solidFill>
                 <a:latin typeface="Helvetica Neue"/>
                 <a:ea typeface="Helvetica Neue"/>
@@ -6726,25 +6442,25 @@
               </a:defRPr>
             </a:pPr>
             <a:r>
-              <a:rPr sz="1875" b="0">
-                <a:solidFill>
-                  <a:srgbClr val="6F8076"/>
+              <a:rPr sz="2100" b="1">
+                <a:solidFill>
+                  <a:srgbClr val="16382B"/>
                 </a:solidFill>
                 <a:latin typeface="Helvetica Neue"/>
                 <a:ea typeface="Helvetica Neue"/>
                 <a:cs typeface="Helvetica Neue"/>
               </a:rPr>
-              <a:t>веса в JSON</a:t>
-            </a:r>
-          </a:p>
-        </p:txBody>
-      </p:sp>
-      <p:sp>
-        <p:nvSpPr>
-          <p:cNvPr id="19" name="">
-            <a:extLst xmlns:a="http://schemas.openxmlformats.org/drawingml/2006/main">
-              <a:ext uri="{FF2B5EF4-FFF2-40B4-BE49-F238E27FC236}">
-                <a16:creationId xmlns:a16="http://schemas.microsoft.com/office/drawing/2014/main" id="{88E1BF72-8A96-4173-BBAD-24E08C3BA4C9}"/>
+              <a:t>Кадры остаются на устройстве</a:t>
+            </a:r>
+          </a:p>
+        </p:txBody>
+      </p:sp>
+      <p:sp>
+        <p:nvSpPr>
+          <p:cNvPr id="14" name="">
+            <a:extLst xmlns:a="http://schemas.openxmlformats.org/drawingml/2006/main">
+              <a:ext uri="{FF2B5EF4-FFF2-40B4-BE49-F238E27FC236}">
+                <a16:creationId xmlns:a16="http://schemas.microsoft.com/office/drawing/2014/main" id="{3A24EFCC-CCC1-4112-9BEB-46D595D8B185}"/>
               </a:ext>
             </a:extLst>
           </p:cNvPr>
@@ -6755,8 +6471,8 @@
         </p:nvSpPr>
         <p:spPr>
           <a:xfrm xmlns:a="http://schemas.openxmlformats.org/drawingml/2006/main">
-            <a:off x="4533900" y="4191000"/>
-            <a:ext cx="2667000" cy="666750"/>
+            <a:off x="609600" y="5524500"/>
+            <a:ext cx="5524500" cy="352425"/>
           </a:xfrm>
           <a:prstGeom xmlns:a="http://schemas.openxmlformats.org/drawingml/2006/main" prst="rect">
             <a:avLst/>
@@ -6770,9 +6486,9 @@
           <a:bodyPr xmlns:a="http://schemas.openxmlformats.org/drawingml/2006/main"/>
           <a:lstStyle xmlns:a="http://schemas.openxmlformats.org/drawingml/2006/main">
             <a:defPPr>
-              <a:defRPr sz="3450" b="1">
-                <a:solidFill>
-                  <a:srgbClr val="16382B"/>
+              <a:defRPr sz="1575" b="0">
+                <a:solidFill>
+                  <a:srgbClr val="6F8076"/>
                 </a:solidFill>
                 <a:latin typeface="Helvetica Neue"/>
                 <a:ea typeface="Helvetica Neue"/>
@@ -6782,9 +6498,9 @@
           </a:lstStyle>
           <a:p xmlns:a="http://schemas.openxmlformats.org/drawingml/2006/main">
             <a:pPr>
-              <a:defRPr sz="3450" b="1">
-                <a:solidFill>
-                  <a:srgbClr val="16382B"/>
+              <a:defRPr sz="1575" b="0">
+                <a:solidFill>
+                  <a:srgbClr val="6F8076"/>
                 </a:solidFill>
                 <a:latin typeface="Helvetica Neue"/>
                 <a:ea typeface="Helvetica Neue"/>
@@ -6792,25 +6508,25 @@
               </a:defRPr>
             </a:pPr>
             <a:r>
-              <a:rPr sz="3450" b="1">
-                <a:solidFill>
-                  <a:srgbClr val="16382B"/>
+              <a:rPr sz="1575" b="0">
+                <a:solidFill>
+                  <a:srgbClr val="6F8076"/>
                 </a:solidFill>
                 <a:latin typeface="Helvetica Neue"/>
                 <a:ea typeface="Helvetica Neue"/>
                 <a:cs typeface="Helvetica Neue"/>
               </a:rPr>
-              <a:t>7 / 7</a:t>
-            </a:r>
-          </a:p>
-        </p:txBody>
-      </p:sp>
-      <p:sp>
-        <p:nvSpPr>
-          <p:cNvPr id="20" name="">
-            <a:extLst xmlns:a="http://schemas.openxmlformats.org/drawingml/2006/main">
-              <a:ext uri="{FF2B5EF4-FFF2-40B4-BE49-F238E27FC236}">
-                <a16:creationId xmlns:a16="http://schemas.microsoft.com/office/drawing/2014/main" id="{9A0530A3-14F8-49DC-96E8-2AB5775C2DDB}"/>
+              <a:t>Логика, декодирование и Python/JS parity</a:t>
+            </a:r>
+          </a:p>
+        </p:txBody>
+      </p:sp>
+      <p:sp>
+        <p:nvSpPr>
+          <p:cNvPr id="15" name="">
+            <a:extLst xmlns:a="http://schemas.openxmlformats.org/drawingml/2006/main">
+              <a:ext uri="{FF2B5EF4-FFF2-40B4-BE49-F238E27FC236}">
+                <a16:creationId xmlns:a16="http://schemas.microsoft.com/office/drawing/2014/main" id="{9B562D92-480A-48C7-89F8-D395CF4FC64B}"/>
               </a:ext>
             </a:extLst>
           </p:cNvPr>
@@ -6821,8 +6537,8 @@
         </p:nvSpPr>
         <p:spPr>
           <a:xfrm xmlns:a="http://schemas.openxmlformats.org/drawingml/2006/main">
-            <a:off x="4533900" y="4943475"/>
-            <a:ext cx="3429000" cy="428625"/>
+            <a:off x="6400800" y="5524500"/>
+            <a:ext cx="5181600" cy="352425"/>
           </a:xfrm>
           <a:prstGeom xmlns:a="http://schemas.openxmlformats.org/drawingml/2006/main" prst="rect">
             <a:avLst/>
@@ -6836,7 +6552,7 @@
           <a:bodyPr xmlns:a="http://schemas.openxmlformats.org/drawingml/2006/main"/>
           <a:lstStyle xmlns:a="http://schemas.openxmlformats.org/drawingml/2006/main">
             <a:defPPr>
-              <a:defRPr sz="1875" b="0">
+              <a:defRPr sz="1575" b="0">
                 <a:solidFill>
                   <a:srgbClr val="6F8076"/>
                 </a:solidFill>
@@ -6848,7 +6564,7 @@
           </a:lstStyle>
           <a:p xmlns:a="http://schemas.openxmlformats.org/drawingml/2006/main">
             <a:pPr>
-              <a:defRPr sz="1875" b="0">
+              <a:defRPr sz="1575" b="0">
                 <a:solidFill>
                   <a:srgbClr val="6F8076"/>
                 </a:solidFill>
@@ -6858,7 +6574,7 @@
               </a:defRPr>
             </a:pPr>
             <a:r>
-              <a:rPr sz="1875" b="0">
+              <a:rPr sz="1575" b="0">
                 <a:solidFill>
                   <a:srgbClr val="6F8076"/>
                 </a:solidFill>
@@ -6866,139 +6582,7 @@
                 <a:ea typeface="Helvetica Neue"/>
                 <a:cs typeface="Helvetica Neue"/>
               </a:rPr>
-              <a:t>тестов пройдено</a:t>
-            </a:r>
-          </a:p>
-        </p:txBody>
-      </p:sp>
-      <p:sp>
-        <p:nvSpPr>
-          <p:cNvPr id="21" name="">
-            <a:extLst xmlns:a="http://schemas.openxmlformats.org/drawingml/2006/main">
-              <a:ext uri="{FF2B5EF4-FFF2-40B4-BE49-F238E27FC236}">
-                <a16:creationId xmlns:a16="http://schemas.microsoft.com/office/drawing/2014/main" id="{827F3873-F711-48DF-9837-A4A079861831}"/>
-              </a:ext>
-            </a:extLst>
-          </p:cNvPr>
-          <p:cNvSpPr>
-            <a:spLocks xmlns:a="http://schemas.openxmlformats.org/drawingml/2006/main" noGrp="1"/>
-          </p:cNvSpPr>
-          <p:nvPr/>
-        </p:nvSpPr>
-        <p:spPr>
-          <a:xfrm xmlns:a="http://schemas.openxmlformats.org/drawingml/2006/main">
-            <a:off x="8382000" y="4191000"/>
-            <a:ext cx="3238500" cy="666750"/>
-          </a:xfrm>
-          <a:prstGeom xmlns:a="http://schemas.openxmlformats.org/drawingml/2006/main" prst="rect">
-            <a:avLst/>
-          </a:prstGeom>
-          <a:noFill xmlns:a="http://schemas.openxmlformats.org/drawingml/2006/main"/>
-          <a:ln xmlns:a="http://schemas.openxmlformats.org/drawingml/2006/main" w="0">
-            <a:noFill/>
-          </a:ln>
-        </p:spPr>
-        <p:txBody>
-          <a:bodyPr xmlns:a="http://schemas.openxmlformats.org/drawingml/2006/main"/>
-          <a:lstStyle xmlns:a="http://schemas.openxmlformats.org/drawingml/2006/main">
-            <a:defPPr>
-              <a:defRPr sz="3450" b="1">
-                <a:solidFill>
-                  <a:srgbClr val="16382B"/>
-                </a:solidFill>
-                <a:latin typeface="Helvetica Neue"/>
-                <a:ea typeface="Helvetica Neue"/>
-                <a:cs typeface="Helvetica Neue"/>
-              </a:defRPr>
-            </a:defPPr>
-          </a:lstStyle>
-          <a:p xmlns:a="http://schemas.openxmlformats.org/drawingml/2006/main">
-            <a:pPr>
-              <a:defRPr sz="3450" b="1">
-                <a:solidFill>
-                  <a:srgbClr val="16382B"/>
-                </a:solidFill>
-                <a:latin typeface="Helvetica Neue"/>
-                <a:ea typeface="Helvetica Neue"/>
-                <a:cs typeface="Helvetica Neue"/>
-              </a:defRPr>
-            </a:pPr>
-            <a:r>
-              <a:rPr sz="3450" b="1">
-                <a:solidFill>
-                  <a:srgbClr val="16382B"/>
-                </a:solidFill>
-                <a:latin typeface="Helvetica Neue"/>
-                <a:ea typeface="Helvetica Neue"/>
-                <a:cs typeface="Helvetica Neue"/>
-              </a:rPr>
-              <a:t>$0 / кадр</a:t>
-            </a:r>
-          </a:p>
-        </p:txBody>
-      </p:sp>
-      <p:sp>
-        <p:nvSpPr>
-          <p:cNvPr id="22" name="">
-            <a:extLst xmlns:a="http://schemas.openxmlformats.org/drawingml/2006/main">
-              <a:ext uri="{FF2B5EF4-FFF2-40B4-BE49-F238E27FC236}">
-                <a16:creationId xmlns:a16="http://schemas.microsoft.com/office/drawing/2014/main" id="{8A19DD10-8860-48BC-B6C1-E887B1E82C3B}"/>
-              </a:ext>
-            </a:extLst>
-          </p:cNvPr>
-          <p:cNvSpPr>
-            <a:spLocks xmlns:a="http://schemas.openxmlformats.org/drawingml/2006/main" noGrp="1"/>
-          </p:cNvSpPr>
-          <p:nvPr/>
-        </p:nvSpPr>
-        <p:spPr>
-          <a:xfrm xmlns:a="http://schemas.openxmlformats.org/drawingml/2006/main">
-            <a:off x="8382000" y="4943475"/>
-            <a:ext cx="3238500" cy="428625"/>
-          </a:xfrm>
-          <a:prstGeom xmlns:a="http://schemas.openxmlformats.org/drawingml/2006/main" prst="rect">
-            <a:avLst/>
-          </a:prstGeom>
-          <a:noFill xmlns:a="http://schemas.openxmlformats.org/drawingml/2006/main"/>
-          <a:ln xmlns:a="http://schemas.openxmlformats.org/drawingml/2006/main" w="0">
-            <a:noFill/>
-          </a:ln>
-        </p:spPr>
-        <p:txBody>
-          <a:bodyPr xmlns:a="http://schemas.openxmlformats.org/drawingml/2006/main"/>
-          <a:lstStyle xmlns:a="http://schemas.openxmlformats.org/drawingml/2006/main">
-            <a:defPPr>
-              <a:defRPr sz="1875" b="0">
-                <a:solidFill>
-                  <a:srgbClr val="6F8076"/>
-                </a:solidFill>
-                <a:latin typeface="Helvetica Neue"/>
-                <a:ea typeface="Helvetica Neue"/>
-                <a:cs typeface="Helvetica Neue"/>
-              </a:defRPr>
-            </a:defPPr>
-          </a:lstStyle>
-          <a:p xmlns:a="http://schemas.openxmlformats.org/drawingml/2006/main">
-            <a:pPr>
-              <a:defRPr sz="1875" b="0">
-                <a:solidFill>
-                  <a:srgbClr val="6F8076"/>
-                </a:solidFill>
-                <a:latin typeface="Helvetica Neue"/>
-                <a:ea typeface="Helvetica Neue"/>
-                <a:cs typeface="Helvetica Neue"/>
-              </a:defRPr>
-            </a:pPr>
-            <a:r>
-              <a:rPr sz="1875" b="0">
-                <a:solidFill>
-                  <a:srgbClr val="6F8076"/>
-                </a:solidFill>
-                <a:latin typeface="Helvetica Neue"/>
-                <a:ea typeface="Helvetica Neue"/>
-                <a:cs typeface="Helvetica Neue"/>
-              </a:rPr>
-              <a:t>только API-стоимость</a:t>
+              <a:t>$0 API-стоимость на кадр</a:t>
             </a:r>
           </a:p>
         </p:txBody>
@@ -7006,7 +6590,7 @@
     </p:spTree>
     <p:extLst>
       <p:ext uri="{BB962C8B-B14F-4D97-AF65-F5344CB8AC3E}">
-        <p14:creationId xmlns:p14="http://schemas.microsoft.com/office/powerpoint/2010/main" val="2014276873"/>
+        <p14:creationId xmlns:p14="http://schemas.microsoft.com/office/powerpoint/2010/main" val="211194100"/>
       </p:ext>
     </p:extLst>
   </p:cSld>
@@ -7037,7 +6621,7 @@
           <p:cNvPr id="11" name="">
             <a:extLst xmlns:a="http://schemas.openxmlformats.org/drawingml/2006/main">
               <a:ext uri="{FF2B5EF4-FFF2-40B4-BE49-F238E27FC236}">
-                <a16:creationId xmlns:a16="http://schemas.microsoft.com/office/drawing/2014/main" id="{23808C34-F849-4C85-8395-B562103A5B8A}"/>
+                <a16:creationId xmlns:a16="http://schemas.microsoft.com/office/drawing/2014/main" id="{7BF77DB7-02D4-4CDF-AA9C-71B433E623E9}"/>
               </a:ext>
             </a:extLst>
           </p:cNvPr>
@@ -7093,7 +6677,7 @@
                 <a:ea typeface="Helvetica Neue"/>
                 <a:cs typeface="Helvetica Neue"/>
               </a:rPr>
-              <a:t>99,27% на тесте — для известных камер</a:t>
+              <a:t>99,27%: занятость мест на известных камерах</a:t>
             </a:r>
           </a:p>
         </p:txBody>
@@ -7103,7 +6687,7 @@
           <p:cNvPr id="2" name="">
             <a:extLst xmlns:a="http://schemas.openxmlformats.org/drawingml/2006/main">
               <a:ext uri="{FF2B5EF4-FFF2-40B4-BE49-F238E27FC236}">
-                <a16:creationId xmlns:a16="http://schemas.microsoft.com/office/drawing/2014/main" id="{6DF7521F-2F5A-4B8F-B634-2AAE291DC531}"/>
+                <a16:creationId xmlns:a16="http://schemas.microsoft.com/office/drawing/2014/main" id="{3A5386DB-D4A1-4D93-8CEB-B1A547C3216C}"/>
               </a:ext>
             </a:extLst>
           </p:cNvPr>
@@ -7133,7 +6717,7 @@
           <p:cNvPr id="3" name="">
             <a:extLst xmlns:a="http://schemas.openxmlformats.org/drawingml/2006/main">
               <a:ext uri="{FF2B5EF4-FFF2-40B4-BE49-F238E27FC236}">
-                <a16:creationId xmlns:a16="http://schemas.microsoft.com/office/drawing/2014/main" id="{1A2F2C0A-C3DB-4409-81BD-F5B522E7FA18}"/>
+                <a16:creationId xmlns:a16="http://schemas.microsoft.com/office/drawing/2014/main" id="{E44985A8-7BBE-42B5-991C-B5B76F8DE13E}"/>
               </a:ext>
             </a:extLst>
           </p:cNvPr>
@@ -7199,7 +6783,7 @@
           <p:cNvPr id="4" name="">
             <a:extLst xmlns:a="http://schemas.openxmlformats.org/drawingml/2006/main">
               <a:ext uri="{FF2B5EF4-FFF2-40B4-BE49-F238E27FC236}">
-                <a16:creationId xmlns:a16="http://schemas.microsoft.com/office/drawing/2014/main" id="{ED595CB3-CBAE-4D2E-B783-B271260DC234}"/>
+                <a16:creationId xmlns:a16="http://schemas.microsoft.com/office/drawing/2014/main" id="{DBD2D710-865C-4515-8EE6-688C1544C4ED}"/>
               </a:ext>
             </a:extLst>
           </p:cNvPr>
@@ -7265,7 +6849,7 @@
           <p:cNvPr id="5" name="">
             <a:extLst xmlns:a="http://schemas.openxmlformats.org/drawingml/2006/main">
               <a:ext uri="{FF2B5EF4-FFF2-40B4-BE49-F238E27FC236}">
-                <a16:creationId xmlns:a16="http://schemas.microsoft.com/office/drawing/2014/main" id="{73AE0B49-15A4-4226-990A-0AA263517B4F}"/>
+                <a16:creationId xmlns:a16="http://schemas.microsoft.com/office/drawing/2014/main" id="{BFBB7AC2-7123-49FF-8AB6-96EF1B1518F8}"/>
               </a:ext>
             </a:extLst>
           </p:cNvPr>
@@ -7331,7 +6915,7 @@
           <p:cNvPr id="6" name="">
             <a:extLst xmlns:a="http://schemas.openxmlformats.org/drawingml/2006/main">
               <a:ext uri="{FF2B5EF4-FFF2-40B4-BE49-F238E27FC236}">
-                <a16:creationId xmlns:a16="http://schemas.microsoft.com/office/drawing/2014/main" id="{41527312-09FB-4500-B8F9-1B36FFA1F993}"/>
+                <a16:creationId xmlns:a16="http://schemas.microsoft.com/office/drawing/2014/main" id="{3351ACC1-6569-4B41-8187-6AD05826C47D}"/>
               </a:ext>
             </a:extLst>
           </p:cNvPr>
@@ -7397,7 +6981,7 @@
           <p:cNvPr id="7" name="">
             <a:extLst xmlns:a="http://schemas.openxmlformats.org/drawingml/2006/main">
               <a:ext uri="{FF2B5EF4-FFF2-40B4-BE49-F238E27FC236}">
-                <a16:creationId xmlns:a16="http://schemas.microsoft.com/office/drawing/2014/main" id="{313E87F0-67FF-4B89-91B0-C7CF50938507}"/>
+                <a16:creationId xmlns:a16="http://schemas.microsoft.com/office/drawing/2014/main" id="{5C465C91-14D5-4872-8893-B494F56E05A1}"/>
               </a:ext>
             </a:extLst>
           </p:cNvPr>
@@ -7486,7 +7070,7 @@
           <p:cNvPr id="8" name="">
             <a:extLst xmlns:a="http://schemas.openxmlformats.org/drawingml/2006/main">
               <a:ext uri="{FF2B5EF4-FFF2-40B4-BE49-F238E27FC236}">
-                <a16:creationId xmlns:a16="http://schemas.microsoft.com/office/drawing/2014/main" id="{70D78EF2-0ECA-4532-BA04-C81CF1BBFE7B}"/>
+                <a16:creationId xmlns:a16="http://schemas.microsoft.com/office/drawing/2014/main" id="{27D0394A-7E19-4223-9397-8E01C46C84D1}"/>
               </a:ext>
             </a:extLst>
           </p:cNvPr>
@@ -7575,7 +7159,7 @@
           <p:cNvPr id="9" name="">
             <a:extLst xmlns:a="http://schemas.openxmlformats.org/drawingml/2006/main">
               <a:ext uri="{FF2B5EF4-FFF2-40B4-BE49-F238E27FC236}">
-                <a16:creationId xmlns:a16="http://schemas.microsoft.com/office/drawing/2014/main" id="{06BF972A-1D9E-4F1C-8A11-8D6DB80243D5}"/>
+                <a16:creationId xmlns:a16="http://schemas.microsoft.com/office/drawing/2014/main" id="{4F59B03A-55F8-43A2-B721-46571792DF19}"/>
               </a:ext>
             </a:extLst>
           </p:cNvPr>
@@ -7903,7 +7487,7 @@
           <p:cNvPr id="10" name="">
             <a:extLst xmlns:a="http://schemas.openxmlformats.org/drawingml/2006/main">
               <a:ext uri="{FF2B5EF4-FFF2-40B4-BE49-F238E27FC236}">
-                <a16:creationId xmlns:a16="http://schemas.microsoft.com/office/drawing/2014/main" id="{65FCDF3A-D204-4D5D-83B2-B0778066005A}"/>
+                <a16:creationId xmlns:a16="http://schemas.microsoft.com/office/drawing/2014/main" id="{1564EF54-997D-46C4-8E07-8DA884B56C23}"/>
               </a:ext>
             </a:extLst>
           </p:cNvPr>
@@ -7990,7 +7574,7 @@
     </p:spTree>
     <p:extLst>
       <p:ext uri="{BB962C8B-B14F-4D97-AF65-F5344CB8AC3E}">
-        <p14:creationId xmlns:p14="http://schemas.microsoft.com/office/powerpoint/2010/main" val="251539451"/>
+        <p14:creationId xmlns:p14="http://schemas.microsoft.com/office/powerpoint/2010/main" val="1920054993"/>
       </p:ext>
     </p:extLst>
   </p:cSld>
@@ -8021,7 +7605,7 @@
           <p:cNvPr id="13" name="">
             <a:extLst xmlns:a="http://schemas.openxmlformats.org/drawingml/2006/main">
               <a:ext uri="{FF2B5EF4-FFF2-40B4-BE49-F238E27FC236}">
-                <a16:creationId xmlns:a16="http://schemas.microsoft.com/office/drawing/2014/main" id="{AB4035A8-8616-4285-B376-BE1F1798855F}"/>
+                <a16:creationId xmlns:a16="http://schemas.microsoft.com/office/drawing/2014/main" id="{FE98E27F-6169-4293-B966-A2C918570831}"/>
               </a:ext>
             </a:extLst>
           </p:cNvPr>
@@ -8077,7 +7661,7 @@
                 <a:ea typeface="Helvetica Neue"/>
                 <a:cs typeface="Helvetica Neue"/>
               </a:rPr>
-              <a:t>Измеряем скорость и признаём ограничения</a:t>
+              <a:t>Скорость и ограничения распознавания</a:t>
             </a:r>
           </a:p>
         </p:txBody>
@@ -8087,7 +7671,7 @@
           <p:cNvPr id="2" name="">
             <a:extLst xmlns:a="http://schemas.openxmlformats.org/drawingml/2006/main">
               <a:ext uri="{FF2B5EF4-FFF2-40B4-BE49-F238E27FC236}">
-                <a16:creationId xmlns:a16="http://schemas.microsoft.com/office/drawing/2014/main" id="{7BC81B5D-72B4-402E-9265-085703A4820E}"/>
+                <a16:creationId xmlns:a16="http://schemas.microsoft.com/office/drawing/2014/main" id="{481D4BEF-1C35-44DD-81F0-F48541A78E7C}"/>
               </a:ext>
             </a:extLst>
           </p:cNvPr>
@@ -8117,7 +7701,7 @@
           <p:cNvPr id="3" name="">
             <a:extLst xmlns:a="http://schemas.openxmlformats.org/drawingml/2006/main">
               <a:ext uri="{FF2B5EF4-FFF2-40B4-BE49-F238E27FC236}">
-                <a16:creationId xmlns:a16="http://schemas.microsoft.com/office/drawing/2014/main" id="{8BD688A1-B987-455E-B1BD-E62D0DB9A9F4}"/>
+                <a16:creationId xmlns:a16="http://schemas.microsoft.com/office/drawing/2014/main" id="{49A5A1CC-5B74-4061-8D47-8989981F5049}"/>
               </a:ext>
             </a:extLst>
           </p:cNvPr>
@@ -8183,7 +7767,7 @@
           <p:cNvPr id="4" name="">
             <a:extLst xmlns:a="http://schemas.openxmlformats.org/drawingml/2006/main">
               <a:ext uri="{FF2B5EF4-FFF2-40B4-BE49-F238E27FC236}">
-                <a16:creationId xmlns:a16="http://schemas.microsoft.com/office/drawing/2014/main" id="{867C012C-B5FB-4659-8F92-02C3DD1771FB}"/>
+                <a16:creationId xmlns:a16="http://schemas.microsoft.com/office/drawing/2014/main" id="{DEDC6154-6E19-4684-A87C-6F60328CF520}"/>
               </a:ext>
             </a:extLst>
           </p:cNvPr>
@@ -8249,7 +7833,7 @@
           <p:cNvPr id="5" name="">
             <a:extLst xmlns:a="http://schemas.openxmlformats.org/drawingml/2006/main">
               <a:ext uri="{FF2B5EF4-FFF2-40B4-BE49-F238E27FC236}">
-                <a16:creationId xmlns:a16="http://schemas.microsoft.com/office/drawing/2014/main" id="{42D9EF9B-C219-4CD4-816A-0AC661CD0E07}"/>
+                <a16:creationId xmlns:a16="http://schemas.microsoft.com/office/drawing/2014/main" id="{58456452-7AF9-4A9E-9A47-A45243EF9E80}"/>
               </a:ext>
             </a:extLst>
           </p:cNvPr>
@@ -8261,7 +7845,7 @@
         <p:spPr>
           <a:xfrm xmlns:a="http://schemas.openxmlformats.org/drawingml/2006/main">
             <a:off x="609600" y="1828800"/>
-            <a:ext cx="5238750" cy="952500"/>
+            <a:ext cx="5619750" cy="952500"/>
           </a:xfrm>
           <a:prstGeom xmlns:a="http://schemas.openxmlformats.org/drawingml/2006/main" prst="rect">
             <a:avLst/>
@@ -8275,7 +7859,7 @@
           <a:bodyPr xmlns:a="http://schemas.openxmlformats.org/drawingml/2006/main"/>
           <a:lstStyle xmlns:a="http://schemas.openxmlformats.org/drawingml/2006/main">
             <a:defPPr>
-              <a:defRPr sz="5025" b="1">
+              <a:defRPr sz="4800" b="1">
                 <a:solidFill>
                   <a:srgbClr val="16664B"/>
                 </a:solidFill>
@@ -8287,7 +7871,7 @@
           </a:lstStyle>
           <a:p xmlns:a="http://schemas.openxmlformats.org/drawingml/2006/main">
             <a:pPr>
-              <a:defRPr sz="5025" b="1">
+              <a:defRPr sz="4800" b="1">
                 <a:solidFill>
                   <a:srgbClr val="16664B"/>
                 </a:solidFill>
@@ -8297,7 +7881,7 @@
               </a:defRPr>
             </a:pPr>
             <a:r>
-              <a:rPr sz="5025" b="1">
+              <a:rPr sz="4800" b="1">
                 <a:solidFill>
                   <a:srgbClr val="16664B"/>
                 </a:solidFill>
@@ -8305,7 +7889,7 @@
                 <a:ea typeface="Helvetica Neue"/>
                 <a:cs typeface="Helvetica Neue"/>
               </a:rPr>
-              <a:t>13–19 ms</a:t>
+              <a:t>58–127 ms</a:t>
             </a:r>
           </a:p>
         </p:txBody>
@@ -8315,7 +7899,7 @@
           <p:cNvPr id="6" name="">
             <a:extLst xmlns:a="http://schemas.openxmlformats.org/drawingml/2006/main">
               <a:ext uri="{FF2B5EF4-FFF2-40B4-BE49-F238E27FC236}">
-                <a16:creationId xmlns:a16="http://schemas.microsoft.com/office/drawing/2014/main" id="{FCFA8498-0635-42F2-A799-14B186387992}"/>
+                <a16:creationId xmlns:a16="http://schemas.microsoft.com/office/drawing/2014/main" id="{1794ED95-3DE1-448D-8076-8FCA259D728B}"/>
               </a:ext>
             </a:extLst>
           </p:cNvPr>
@@ -8327,7 +7911,7 @@
         <p:spPr>
           <a:xfrm xmlns:a="http://schemas.openxmlformats.org/drawingml/2006/main">
             <a:off x="609600" y="2876550"/>
-            <a:ext cx="5762625" cy="504825"/>
+            <a:ext cx="5857875" cy="600075"/>
           </a:xfrm>
           <a:prstGeom xmlns:a="http://schemas.openxmlformats.org/drawingml/2006/main" prst="rect">
             <a:avLst/>
@@ -8341,7 +7925,7 @@
           <a:bodyPr xmlns:a="http://schemas.openxmlformats.org/drawingml/2006/main"/>
           <a:lstStyle xmlns:a="http://schemas.openxmlformats.org/drawingml/2006/main">
             <a:defPPr>
-              <a:defRPr sz="1950" b="0">
+              <a:defRPr sz="1800" b="0">
                 <a:solidFill>
                   <a:srgbClr val="6F8076"/>
                 </a:solidFill>
@@ -8353,7 +7937,7 @@
           </a:lstStyle>
           <a:p xmlns:a="http://schemas.openxmlformats.org/drawingml/2006/main">
             <a:pPr>
-              <a:defRPr sz="1950" b="0">
+              <a:defRPr sz="1800" b="0">
                 <a:solidFill>
                   <a:srgbClr val="6F8076"/>
                 </a:solidFill>
@@ -8363,7 +7947,7 @@
               </a:defRPr>
             </a:pPr>
             <a:r>
-              <a:rPr sz="1950" b="0">
+              <a:rPr sz="1800" b="0">
                 <a:solidFill>
                   <a:srgbClr val="6F8076"/>
                 </a:solidFill>
@@ -8371,7 +7955,7 @@
                 <a:ea typeface="Helvetica Neue"/>
                 <a:cs typeface="Helvetica Neue"/>
               </a:rPr>
-              <a:t>наблюдения для 100 зон · Apple M5</a:t>
+              <a:t>отдельные запуски детектора · Apple M5</a:t>
             </a:r>
           </a:p>
         </p:txBody>
@@ -8381,7 +7965,7 @@
           <p:cNvPr id="7" name="">
             <a:extLst xmlns:a="http://schemas.openxmlformats.org/drawingml/2006/main">
               <a:ext uri="{FF2B5EF4-FFF2-40B4-BE49-F238E27FC236}">
-                <a16:creationId xmlns:a16="http://schemas.microsoft.com/office/drawing/2014/main" id="{C9F45C17-DFA1-46BB-8107-670938AA09B3}"/>
+                <a16:creationId xmlns:a16="http://schemas.microsoft.com/office/drawing/2014/main" id="{3A402A30-7947-4CE5-AB11-3FCF0A1D3672}"/>
               </a:ext>
             </a:extLst>
           </p:cNvPr>
@@ -8392,8 +7976,8 @@
         </p:nvSpPr>
         <p:spPr>
           <a:xfrm xmlns:a="http://schemas.openxmlformats.org/drawingml/2006/main">
-            <a:off x="609600" y="3905250"/>
-            <a:ext cx="5334000" cy="933450"/>
+            <a:off x="609600" y="3943350"/>
+            <a:ext cx="5695950" cy="933450"/>
           </a:xfrm>
           <a:prstGeom xmlns:a="http://schemas.openxmlformats.org/drawingml/2006/main" prst="rect">
             <a:avLst/>
@@ -8407,7 +7991,7 @@
           <a:bodyPr xmlns:a="http://schemas.openxmlformats.org/drawingml/2006/main"/>
           <a:lstStyle xmlns:a="http://schemas.openxmlformats.org/drawingml/2006/main">
             <a:defPPr>
-              <a:defRPr sz="2175" b="0">
+              <a:defRPr sz="2025" b="0">
                 <a:solidFill>
                   <a:srgbClr val="16382B"/>
                 </a:solidFill>
@@ -8419,7 +8003,7 @@
           </a:lstStyle>
           <a:p xmlns:a="http://schemas.openxmlformats.org/drawingml/2006/main">
             <a:pPr>
-              <a:defRPr sz="2175" b="0">
+              <a:defRPr sz="2025" b="0">
                 <a:solidFill>
                   <a:srgbClr val="16382B"/>
                 </a:solidFill>
@@ -8429,7 +8013,7 @@
               </a:defRPr>
             </a:pPr>
             <a:r>
-              <a:rPr sz="2175" b="0">
+              <a:rPr sz="2025" b="0">
                 <a:solidFill>
                   <a:srgbClr val="16382B"/>
                 </a:solidFill>
@@ -8437,12 +8021,12 @@
                 <a:ea typeface="Helvetica Neue"/>
                 <a:cs typeface="Helvetica Neue"/>
               </a:rPr>
-              <a:t>Признаки + модель + правила</a:t>
+              <a:t>Занятость 100 зон: 13–19 ms</a:t>
             </a:r>
           </a:p>
           <a:p xmlns:a="http://schemas.openxmlformats.org/drawingml/2006/main">
             <a:pPr>
-              <a:defRPr sz="2175" b="0">
+              <a:defRPr sz="2025" b="0">
                 <a:solidFill>
                   <a:srgbClr val="16382B"/>
                 </a:solidFill>
@@ -8452,7 +8036,7 @@
               </a:defRPr>
             </a:pPr>
             <a:r>
-              <a:rPr sz="2175" b="0">
+              <a:rPr sz="2025" b="0">
                 <a:solidFill>
                   <a:srgbClr val="16382B"/>
                 </a:solidFill>
@@ -8460,7 +8044,7 @@
                 <a:ea typeface="Helvetica Neue"/>
                 <a:cs typeface="Helvetica Neue"/>
               </a:rPr>
-              <a:t>Без загрузки и отрисовки</a:t>
+              <a:t>Загрузка и отрисовка вне таймера</a:t>
             </a:r>
           </a:p>
         </p:txBody>
@@ -8470,7 +8054,7 @@
           <p:cNvPr id="8" name="">
             <a:extLst xmlns:a="http://schemas.openxmlformats.org/drawingml/2006/main">
               <a:ext uri="{FF2B5EF4-FFF2-40B4-BE49-F238E27FC236}">
-                <a16:creationId xmlns:a16="http://schemas.microsoft.com/office/drawing/2014/main" id="{9FFBF132-272F-42D3-86A6-ECBF5E1500C1}"/>
+                <a16:creationId xmlns:a16="http://schemas.microsoft.com/office/drawing/2014/main" id="{E05FA3AD-07A7-443D-8645-3CC19A3E83A3}"/>
               </a:ext>
             </a:extLst>
           </p:cNvPr>
@@ -8526,7 +8110,7 @@
                 <a:ea typeface="Helvetica Neue"/>
                 <a:cs typeface="Helvetica Neue"/>
               </a:rPr>
-              <a:t>Скорость на устройстве жюри видна в UI</a:t>
+              <a:t>Скорость устройства жюри видна в UI</a:t>
             </a:r>
           </a:p>
         </p:txBody>
@@ -8536,7 +8120,7 @@
           <p:cNvPr id="9" name="">
             <a:extLst xmlns:a="http://schemas.openxmlformats.org/drawingml/2006/main">
               <a:ext uri="{FF2B5EF4-FFF2-40B4-BE49-F238E27FC236}">
-                <a16:creationId xmlns:a16="http://schemas.microsoft.com/office/drawing/2014/main" id="{5A33FECC-74C8-4DA7-9425-1B6CF6C0244E}"/>
+                <a16:creationId xmlns:a16="http://schemas.microsoft.com/office/drawing/2014/main" id="{148DA1A3-560B-4568-B229-E231A97BD6BD}"/>
               </a:ext>
             </a:extLst>
           </p:cNvPr>
@@ -8566,7 +8150,7 @@
           <p:cNvPr id="10" name="">
             <a:extLst xmlns:a="http://schemas.openxmlformats.org/drawingml/2006/main">
               <a:ext uri="{FF2B5EF4-FFF2-40B4-BE49-F238E27FC236}">
-                <a16:creationId xmlns:a16="http://schemas.microsoft.com/office/drawing/2014/main" id="{B1CF88A6-28FD-45A7-A264-5F47BC2FEA08}"/>
+                <a16:creationId xmlns:a16="http://schemas.microsoft.com/office/drawing/2014/main" id="{D6CF1E1D-1660-42F2-9B1D-A40B04AB1703}"/>
               </a:ext>
             </a:extLst>
           </p:cNvPr>
@@ -8622,7 +8206,7 @@
                 <a:ea typeface="Helvetica Neue"/>
                 <a:cs typeface="Helvetica Neue"/>
               </a:rPr>
-              <a:t>Не доказано</a:t>
+              <a:t>Ограничения</a:t>
             </a:r>
           </a:p>
         </p:txBody>
@@ -8632,7 +8216,7 @@
           <p:cNvPr id="11" name="">
             <a:extLst xmlns:a="http://schemas.openxmlformats.org/drawingml/2006/main">
               <a:ext uri="{FF2B5EF4-FFF2-40B4-BE49-F238E27FC236}">
-                <a16:creationId xmlns:a16="http://schemas.microsoft.com/office/drawing/2014/main" id="{55EA0913-C763-4C5B-87CA-C51ECAB25D31}"/>
+                <a16:creationId xmlns:a16="http://schemas.microsoft.com/office/drawing/2014/main" id="{B96B722B-3B69-4BDC-9C08-9B4EBEA6AA73}"/>
               </a:ext>
             </a:extLst>
           </p:cNvPr>
@@ -8658,7 +8242,7 @@
           <a:bodyPr xmlns:a="http://schemas.openxmlformats.org/drawingml/2006/main"/>
           <a:lstStyle xmlns:a="http://schemas.openxmlformats.org/drawingml/2006/main">
             <a:defPPr>
-              <a:defRPr sz="2025" b="0">
+              <a:defRPr sz="1950" b="0">
                 <a:solidFill>
                   <a:srgbClr val="6F8076"/>
                 </a:solidFill>
@@ -8670,7 +8254,7 @@
           </a:lstStyle>
           <a:p xmlns:a="http://schemas.openxmlformats.org/drawingml/2006/main">
             <a:pPr>
-              <a:defRPr sz="2025" b="0">
+              <a:defRPr sz="1950" b="0">
                 <a:solidFill>
                   <a:srgbClr val="6F8076"/>
                 </a:solidFill>
@@ -8680,7 +8264,7 @@
               </a:defRPr>
             </a:pPr>
             <a:r>
-              <a:rPr sz="2025" b="0">
+              <a:rPr sz="1950" b="0">
                 <a:solidFill>
                   <a:srgbClr val="6F8076"/>
                 </a:solidFill>
@@ -8688,12 +8272,12 @@
                 <a:ea typeface="Helvetica Neue"/>
                 <a:cs typeface="Helvetica Neue"/>
               </a:rPr>
-              <a:t>Ночь и сильный дождь</a:t>
+              <a:t>Мелкие и перекрытые машины</a:t>
             </a:r>
           </a:p>
           <a:p xmlns:a="http://schemas.openxmlformats.org/drawingml/2006/main">
             <a:pPr>
-              <a:defRPr sz="2025" b="0">
+              <a:defRPr sz="1950" b="0">
                 <a:solidFill>
                   <a:srgbClr val="6F8076"/>
                 </a:solidFill>
@@ -8703,7 +8287,7 @@
               </a:defRPr>
             </a:pPr>
             <a:r>
-              <a:rPr sz="2025" b="0">
+              <a:rPr sz="1950" b="0">
                 <a:solidFill>
                   <a:srgbClr val="6F8076"/>
                 </a:solidFill>
@@ -8711,12 +8295,12 @@
                 <a:ea typeface="Helvetica Neue"/>
                 <a:cs typeface="Helvetica Neue"/>
               </a:rPr>
-              <a:t>Локальные Toyota / BYD / Ducati</a:t>
+              <a:t>Ночь и местные камеры</a:t>
             </a:r>
           </a:p>
           <a:p xmlns:a="http://schemas.openxmlformats.org/drawingml/2006/main">
             <a:pPr>
-              <a:defRPr sz="2025" b="0">
+              <a:defRPr sz="1950" b="0">
                 <a:solidFill>
                   <a:srgbClr val="6F8076"/>
                 </a:solidFill>
@@ -8726,7 +8310,7 @@
               </a:defRPr>
             </a:pPr>
             <a:r>
-              <a:rPr sz="2025" b="0">
+              <a:rPr sz="1950" b="0">
                 <a:solidFill>
                   <a:srgbClr val="6F8076"/>
                 </a:solidFill>
@@ -8734,12 +8318,12 @@
                 <a:ea typeface="Helvetica Neue"/>
                 <a:cs typeface="Helvetica Neue"/>
               </a:rPr>
-              <a:t>Новый ракурс без калибровки</a:t>
+              <a:t>Полнота детектора не измерена</a:t>
             </a:r>
           </a:p>
           <a:p xmlns:a="http://schemas.openxmlformats.org/drawingml/2006/main">
             <a:pPr>
-              <a:defRPr sz="2025" b="0">
+              <a:defRPr sz="1950" b="0">
                 <a:solidFill>
                   <a:srgbClr val="6F8076"/>
                 </a:solidFill>
@@ -8749,7 +8333,7 @@
               </a:defRPr>
             </a:pPr>
             <a:r>
-              <a:rPr sz="2025" b="0">
+              <a:rPr sz="1950" b="0">
                 <a:solidFill>
                   <a:srgbClr val="6F8076"/>
                 </a:solidFill>
@@ -8757,7 +8341,7 @@
                 <a:ea typeface="Helvetica Neue"/>
                 <a:cs typeface="Helvetica Neue"/>
               </a:rPr>
-              <a:t>Работа 24/7 в фоне</a:t>
+              <a:t>Работа 24/7 не проверена</a:t>
             </a:r>
           </a:p>
         </p:txBody>
@@ -8767,7 +8351,7 @@
           <p:cNvPr id="12" name="">
             <a:extLst xmlns:a="http://schemas.openxmlformats.org/drawingml/2006/main">
               <a:ext uri="{FF2B5EF4-FFF2-40B4-BE49-F238E27FC236}">
-                <a16:creationId xmlns:a16="http://schemas.microsoft.com/office/drawing/2014/main" id="{6B47478A-8022-45FB-8793-2A74D285AC88}"/>
+                <a16:creationId xmlns:a16="http://schemas.microsoft.com/office/drawing/2014/main" id="{EDE74B32-6697-4730-A497-D9ED06CBA666}"/>
               </a:ext>
             </a:extLst>
           </p:cNvPr>
@@ -8779,7 +8363,7 @@
         <p:spPr>
           <a:xfrm xmlns:a="http://schemas.openxmlformats.org/drawingml/2006/main">
             <a:off x="7181850" y="5400675"/>
-            <a:ext cx="4000500" cy="428625"/>
+            <a:ext cx="4305300" cy="428625"/>
           </a:xfrm>
           <a:prstGeom xmlns:a="http://schemas.openxmlformats.org/drawingml/2006/main" prst="rect">
             <a:avLst/>
@@ -8793,7 +8377,7 @@
           <a:bodyPr xmlns:a="http://schemas.openxmlformats.org/drawingml/2006/main"/>
           <a:lstStyle xmlns:a="http://schemas.openxmlformats.org/drawingml/2006/main">
             <a:defPPr>
-              <a:defRPr sz="2100" b="1">
+              <a:defRPr sz="1875" b="1">
                 <a:solidFill>
                   <a:srgbClr val="CA7B49"/>
                 </a:solidFill>
@@ -8805,7 +8389,7 @@
           </a:lstStyle>
           <a:p xmlns:a="http://schemas.openxmlformats.org/drawingml/2006/main">
             <a:pPr>
-              <a:defRPr sz="2100" b="1">
+              <a:defRPr sz="1875" b="1">
                 <a:solidFill>
                   <a:srgbClr val="CA7B49"/>
                 </a:solidFill>
@@ -8815,7 +8399,7 @@
               </a:defRPr>
             </a:pPr>
             <a:r>
-              <a:rPr sz="2100" b="1">
+              <a:rPr sz="1875" b="1">
                 <a:solidFill>
                   <a:srgbClr val="CA7B49"/>
                 </a:solidFill>
@@ -8823,7 +8407,7 @@
                 <a:ea typeface="Helvetica Neue"/>
                 <a:cs typeface="Helvetica Neue"/>
               </a:rPr>
-              <a:t>Занято ≠ заряжается</a:t>
+              <a:t>Пустое место требует зоны</a:t>
             </a:r>
           </a:p>
         </p:txBody>
@@ -8831,7 +8415,7 @@
     </p:spTree>
     <p:extLst>
       <p:ext uri="{BB962C8B-B14F-4D97-AF65-F5344CB8AC3E}">
-        <p14:creationId xmlns:p14="http://schemas.microsoft.com/office/powerpoint/2010/main" val="1836574262"/>
+        <p14:creationId xmlns:p14="http://schemas.microsoft.com/office/powerpoint/2010/main" val="319277787"/>
       </p:ext>
     </p:extLst>
   </p:cSld>
@@ -8862,7 +8446,7 @@
           <p:cNvPr id="12" name="">
             <a:extLst xmlns:a="http://schemas.openxmlformats.org/drawingml/2006/main">
               <a:ext uri="{FF2B5EF4-FFF2-40B4-BE49-F238E27FC236}">
-                <a16:creationId xmlns:a16="http://schemas.microsoft.com/office/drawing/2014/main" id="{24383772-B1EF-4575-AAE4-7D6DD5B22F4E}"/>
+                <a16:creationId xmlns:a16="http://schemas.microsoft.com/office/drawing/2014/main" id="{65591487-9EB2-46FC-8A8E-2CB5511BA74B}"/>
               </a:ext>
             </a:extLst>
           </p:cNvPr>
@@ -8928,7 +8512,7 @@
           <p:cNvPr id="2" name="">
             <a:extLst xmlns:a="http://schemas.openxmlformats.org/drawingml/2006/main">
               <a:ext uri="{FF2B5EF4-FFF2-40B4-BE49-F238E27FC236}">
-                <a16:creationId xmlns:a16="http://schemas.microsoft.com/office/drawing/2014/main" id="{621A115D-58BE-4D35-8A67-553DD6CE782D}"/>
+                <a16:creationId xmlns:a16="http://schemas.microsoft.com/office/drawing/2014/main" id="{2FB4FFD2-E4BD-4EEA-B7CA-6FA724F6388B}"/>
               </a:ext>
             </a:extLst>
           </p:cNvPr>
@@ -8958,7 +8542,7 @@
           <p:cNvPr id="3" name="">
             <a:extLst xmlns:a="http://schemas.openxmlformats.org/drawingml/2006/main">
               <a:ext uri="{FF2B5EF4-FFF2-40B4-BE49-F238E27FC236}">
-                <a16:creationId xmlns:a16="http://schemas.microsoft.com/office/drawing/2014/main" id="{8A950D3C-4E00-4782-B7F9-84C133C51A0C}"/>
+                <a16:creationId xmlns:a16="http://schemas.microsoft.com/office/drawing/2014/main" id="{E913B17A-945D-471F-BF8C-457A42FE3AC7}"/>
               </a:ext>
             </a:extLst>
           </p:cNvPr>
@@ -9024,7 +8608,7 @@
           <p:cNvPr id="4" name="">
             <a:extLst xmlns:a="http://schemas.openxmlformats.org/drawingml/2006/main">
               <a:ext uri="{FF2B5EF4-FFF2-40B4-BE49-F238E27FC236}">
-                <a16:creationId xmlns:a16="http://schemas.microsoft.com/office/drawing/2014/main" id="{6B7CA86B-C10D-4996-8224-04E8BA63DB1C}"/>
+                <a16:creationId xmlns:a16="http://schemas.microsoft.com/office/drawing/2014/main" id="{A5CB6841-8F68-4362-A75A-9154FF37A93F}"/>
               </a:ext>
             </a:extLst>
           </p:cNvPr>
@@ -9090,7 +8674,7 @@
           <p:cNvPr id="5" name="">
             <a:extLst xmlns:a="http://schemas.openxmlformats.org/drawingml/2006/main">
               <a:ext uri="{FF2B5EF4-FFF2-40B4-BE49-F238E27FC236}">
-                <a16:creationId xmlns:a16="http://schemas.microsoft.com/office/drawing/2014/main" id="{E7321DE7-26E5-47DE-B2AD-FEE6D0AF8209}"/>
+                <a16:creationId xmlns:a16="http://schemas.microsoft.com/office/drawing/2014/main" id="{4B4AF870-BFBF-472A-99D5-7011D403F172}"/>
               </a:ext>
             </a:extLst>
           </p:cNvPr>
@@ -9368,7 +8952,7 @@
           <p:cNvPr id="6" name="">
             <a:extLst xmlns:a="http://schemas.openxmlformats.org/drawingml/2006/main">
               <a:ext uri="{FF2B5EF4-FFF2-40B4-BE49-F238E27FC236}">
-                <a16:creationId xmlns:a16="http://schemas.microsoft.com/office/drawing/2014/main" id="{E1B7B0B8-53AF-417B-A48D-5F9B34283158}"/>
+                <a16:creationId xmlns:a16="http://schemas.microsoft.com/office/drawing/2014/main" id="{E2D1EEE7-BA62-430C-86CA-A207CEB13F5E}"/>
               </a:ext>
             </a:extLst>
           </p:cNvPr>
@@ -9434,7 +9018,7 @@
           <p:cNvPr id="7" name="">
             <a:extLst xmlns:a="http://schemas.openxmlformats.org/drawingml/2006/main">
               <a:ext uri="{FF2B5EF4-FFF2-40B4-BE49-F238E27FC236}">
-                <a16:creationId xmlns:a16="http://schemas.microsoft.com/office/drawing/2014/main" id="{30E1AC2A-5C94-4355-AFED-8CC1239947A6}"/>
+                <a16:creationId xmlns:a16="http://schemas.microsoft.com/office/drawing/2014/main" id="{7E3AFAA7-EB56-4FC9-B398-C91CE34E7B24}"/>
               </a:ext>
             </a:extLst>
           </p:cNvPr>
@@ -9500,7 +9084,7 @@
           <p:cNvPr id="8" name="">
             <a:extLst xmlns:a="http://schemas.openxmlformats.org/drawingml/2006/main">
               <a:ext uri="{FF2B5EF4-FFF2-40B4-BE49-F238E27FC236}">
-                <a16:creationId xmlns:a16="http://schemas.microsoft.com/office/drawing/2014/main" id="{7B81A4FA-CEDC-4574-93F4-9BE5D26CFD93}"/>
+                <a16:creationId xmlns:a16="http://schemas.microsoft.com/office/drawing/2014/main" id="{9ADC45DF-251C-4070-A39B-1EA792488ACB}"/>
               </a:ext>
             </a:extLst>
           </p:cNvPr>
@@ -9566,7 +9150,7 @@
           <p:cNvPr id="9" name="">
             <a:extLst xmlns:a="http://schemas.openxmlformats.org/drawingml/2006/main">
               <a:ext uri="{FF2B5EF4-FFF2-40B4-BE49-F238E27FC236}">
-                <a16:creationId xmlns:a16="http://schemas.microsoft.com/office/drawing/2014/main" id="{31803546-D228-4074-8394-046EB1BF1EC0}"/>
+                <a16:creationId xmlns:a16="http://schemas.microsoft.com/office/drawing/2014/main" id="{E11C7D45-7BE4-4620-92D7-0476935FA605}"/>
               </a:ext>
             </a:extLst>
           </p:cNvPr>
@@ -9632,7 +9216,7 @@
           <p:cNvPr id="10" name="">
             <a:extLst xmlns:a="http://schemas.openxmlformats.org/drawingml/2006/main">
               <a:ext uri="{FF2B5EF4-FFF2-40B4-BE49-F238E27FC236}">
-                <a16:creationId xmlns:a16="http://schemas.microsoft.com/office/drawing/2014/main" id="{6068F29B-3E77-4C04-AFA4-99D1B6C60F25}"/>
+                <a16:creationId xmlns:a16="http://schemas.microsoft.com/office/drawing/2014/main" id="{C5D7F993-E0EC-4894-8DC6-2A5D7749E603}"/>
               </a:ext>
             </a:extLst>
           </p:cNvPr>
@@ -9698,7 +9282,7 @@
           <p:cNvPr id="11" name="">
             <a:extLst xmlns:a="http://schemas.openxmlformats.org/drawingml/2006/main">
               <a:ext uri="{FF2B5EF4-FFF2-40B4-BE49-F238E27FC236}">
-                <a16:creationId xmlns:a16="http://schemas.microsoft.com/office/drawing/2014/main" id="{D9ECD77A-D2A1-4308-AC7F-046923E3F277}"/>
+                <a16:creationId xmlns:a16="http://schemas.microsoft.com/office/drawing/2014/main" id="{BBCF7A03-1D64-4A4F-87B6-420D56212804}"/>
               </a:ext>
             </a:extLst>
           </p:cNvPr>
@@ -9762,7 +9346,7 @@
     </p:spTree>
     <p:extLst>
       <p:ext uri="{BB962C8B-B14F-4D97-AF65-F5344CB8AC3E}">
-        <p14:creationId xmlns:p14="http://schemas.microsoft.com/office/powerpoint/2010/main" val="2017979190"/>
+        <p14:creationId xmlns:p14="http://schemas.microsoft.com/office/powerpoint/2010/main" val="1453678702"/>
       </p:ext>
     </p:extLst>
   </p:cSld>
@@ -9793,7 +9377,7 @@
           <p:cNvPr id="10" name="">
             <a:extLst xmlns:a="http://schemas.openxmlformats.org/drawingml/2006/main">
               <a:ext uri="{FF2B5EF4-FFF2-40B4-BE49-F238E27FC236}">
-                <a16:creationId xmlns:a16="http://schemas.microsoft.com/office/drawing/2014/main" id="{09AD0DAF-BF26-47E9-9A70-7A68D2C7D83D}"/>
+                <a16:creationId xmlns:a16="http://schemas.microsoft.com/office/drawing/2014/main" id="{AD183FF3-6DFD-45CD-8A4E-741B50AB494C}"/>
               </a:ext>
             </a:extLst>
           </p:cNvPr>
@@ -9859,7 +9443,7 @@
           <p:cNvPr id="2" name="">
             <a:extLst xmlns:a="http://schemas.openxmlformats.org/drawingml/2006/main">
               <a:ext uri="{FF2B5EF4-FFF2-40B4-BE49-F238E27FC236}">
-                <a16:creationId xmlns:a16="http://schemas.microsoft.com/office/drawing/2014/main" id="{61F6BC1F-3C2B-411B-A9D9-3341EA740620}"/>
+                <a16:creationId xmlns:a16="http://schemas.microsoft.com/office/drawing/2014/main" id="{4709F67C-6A21-4C4C-A23D-0BAA8F29297C}"/>
               </a:ext>
             </a:extLst>
           </p:cNvPr>
@@ -9889,7 +9473,7 @@
           <p:cNvPr id="3" name="">
             <a:extLst xmlns:a="http://schemas.openxmlformats.org/drawingml/2006/main">
               <a:ext uri="{FF2B5EF4-FFF2-40B4-BE49-F238E27FC236}">
-                <a16:creationId xmlns:a16="http://schemas.microsoft.com/office/drawing/2014/main" id="{2946D37D-2115-441F-BC62-F4E0703E868A}"/>
+                <a16:creationId xmlns:a16="http://schemas.microsoft.com/office/drawing/2014/main" id="{68B0CD26-4E4A-4841-A53B-2EFD19BC0F30}"/>
               </a:ext>
             </a:extLst>
           </p:cNvPr>
@@ -9955,7 +9539,7 @@
           <p:cNvPr id="4" name="">
             <a:extLst xmlns:a="http://schemas.openxmlformats.org/drawingml/2006/main">
               <a:ext uri="{FF2B5EF4-FFF2-40B4-BE49-F238E27FC236}">
-                <a16:creationId xmlns:a16="http://schemas.microsoft.com/office/drawing/2014/main" id="{FCC4E059-95FF-4887-BFF3-EE7214CD40F2}"/>
+                <a16:creationId xmlns:a16="http://schemas.microsoft.com/office/drawing/2014/main" id="{4E72CC43-41CB-4FF7-83E7-DC48C03E4CF4}"/>
               </a:ext>
             </a:extLst>
           </p:cNvPr>
@@ -10021,7 +9605,7 @@
           <p:cNvPr id="5" name="">
             <a:extLst xmlns:a="http://schemas.openxmlformats.org/drawingml/2006/main">
               <a:ext uri="{FF2B5EF4-FFF2-40B4-BE49-F238E27FC236}">
-                <a16:creationId xmlns:a16="http://schemas.microsoft.com/office/drawing/2014/main" id="{29CDC5D8-EC1B-4986-9D43-98173D6B4181}"/>
+                <a16:creationId xmlns:a16="http://schemas.microsoft.com/office/drawing/2014/main" id="{76A79C6D-4BA5-472F-9DFB-D5580164006B}"/>
               </a:ext>
             </a:extLst>
           </p:cNvPr>
@@ -10087,7 +9671,7 @@
           <p:cNvPr id="6" name="">
             <a:extLst xmlns:a="http://schemas.openxmlformats.org/drawingml/2006/main">
               <a:ext uri="{FF2B5EF4-FFF2-40B4-BE49-F238E27FC236}">
-                <a16:creationId xmlns:a16="http://schemas.microsoft.com/office/drawing/2014/main" id="{5D116A9D-437A-4BB1-B98B-5417EFDF106E}"/>
+                <a16:creationId xmlns:a16="http://schemas.microsoft.com/office/drawing/2014/main" id="{D5F7A2D0-2D73-4578-841A-2DC2CB7F5992}"/>
               </a:ext>
             </a:extLst>
           </p:cNvPr>
@@ -10222,7 +9806,7 @@
           <p:cNvPr id="7" name="">
             <a:extLst xmlns:a="http://schemas.openxmlformats.org/drawingml/2006/main">
               <a:ext uri="{FF2B5EF4-FFF2-40B4-BE49-F238E27FC236}">
-                <a16:creationId xmlns:a16="http://schemas.microsoft.com/office/drawing/2014/main" id="{4CB85CE1-4A0F-463F-9940-28D14BC49F23}"/>
+                <a16:creationId xmlns:a16="http://schemas.microsoft.com/office/drawing/2014/main" id="{A224D246-8588-42AD-B778-33B880054DB5}"/>
               </a:ext>
             </a:extLst>
           </p:cNvPr>
@@ -10252,7 +9836,7 @@
           <p:cNvPr id="8" name="">
             <a:extLst xmlns:a="http://schemas.openxmlformats.org/drawingml/2006/main">
               <a:ext uri="{FF2B5EF4-FFF2-40B4-BE49-F238E27FC236}">
-                <a16:creationId xmlns:a16="http://schemas.microsoft.com/office/drawing/2014/main" id="{7158E9B5-A90D-4F86-BDF6-1D581DA463FD}"/>
+                <a16:creationId xmlns:a16="http://schemas.microsoft.com/office/drawing/2014/main" id="{6718549B-32DE-4A38-8083-04B5BCF11AD4}"/>
               </a:ext>
             </a:extLst>
           </p:cNvPr>
@@ -10318,7 +9902,7 @@
           <p:cNvPr id="9" name="">
             <a:extLst xmlns:a="http://schemas.openxmlformats.org/drawingml/2006/main">
               <a:ext uri="{FF2B5EF4-FFF2-40B4-BE49-F238E27FC236}">
-                <a16:creationId xmlns:a16="http://schemas.microsoft.com/office/drawing/2014/main" id="{A5EE4C45-00E9-4416-97D8-9351F02C374C}"/>
+                <a16:creationId xmlns:a16="http://schemas.microsoft.com/office/drawing/2014/main" id="{6712925F-D9E2-4793-AD20-3F4E5A1C5B6B}"/>
               </a:ext>
             </a:extLst>
           </p:cNvPr>
@@ -10451,7 +10035,7 @@
     </p:spTree>
     <p:extLst>
       <p:ext uri="{BB962C8B-B14F-4D97-AF65-F5344CB8AC3E}">
-        <p14:creationId xmlns:p14="http://schemas.microsoft.com/office/powerpoint/2010/main" val="2038773720"/>
+        <p14:creationId xmlns:p14="http://schemas.microsoft.com/office/powerpoint/2010/main" val="1332520724"/>
       </p:ext>
     </p:extLst>
   </p:cSld>
@@ -10482,7 +10066,7 @@
           <p:cNvPr id="12" name="">
             <a:extLst xmlns:a="http://schemas.openxmlformats.org/drawingml/2006/main">
               <a:ext uri="{FF2B5EF4-FFF2-40B4-BE49-F238E27FC236}">
-                <a16:creationId xmlns:a16="http://schemas.microsoft.com/office/drawing/2014/main" id="{2DD0F5B0-65D5-4D79-9386-DE0F82DACE16}"/>
+                <a16:creationId xmlns:a16="http://schemas.microsoft.com/office/drawing/2014/main" id="{F3736DA0-0CD9-4316-9946-F4A0C0BD09EA}"/>
               </a:ext>
             </a:extLst>
           </p:cNvPr>
@@ -10548,7 +10132,7 @@
           <p:cNvPr id="2" name="">
             <a:extLst xmlns:a="http://schemas.openxmlformats.org/drawingml/2006/main">
               <a:ext uri="{FF2B5EF4-FFF2-40B4-BE49-F238E27FC236}">
-                <a16:creationId xmlns:a16="http://schemas.microsoft.com/office/drawing/2014/main" id="{F96E739C-D401-46D7-A174-2B7007FFD026}"/>
+                <a16:creationId xmlns:a16="http://schemas.microsoft.com/office/drawing/2014/main" id="{61F4BC27-F4D2-4D22-8E98-FF81BD6CF8AF}"/>
               </a:ext>
             </a:extLst>
           </p:cNvPr>
@@ -10578,7 +10162,7 @@
           <p:cNvPr id="3" name="">
             <a:extLst xmlns:a="http://schemas.openxmlformats.org/drawingml/2006/main">
               <a:ext uri="{FF2B5EF4-FFF2-40B4-BE49-F238E27FC236}">
-                <a16:creationId xmlns:a16="http://schemas.microsoft.com/office/drawing/2014/main" id="{9365C806-5D8F-469B-B307-23775107D137}"/>
+                <a16:creationId xmlns:a16="http://schemas.microsoft.com/office/drawing/2014/main" id="{E873D055-957D-4CC8-9087-569C050DE9B9}"/>
               </a:ext>
             </a:extLst>
           </p:cNvPr>
@@ -10644,7 +10228,7 @@
           <p:cNvPr id="4" name="">
             <a:extLst xmlns:a="http://schemas.openxmlformats.org/drawingml/2006/main">
               <a:ext uri="{FF2B5EF4-FFF2-40B4-BE49-F238E27FC236}">
-                <a16:creationId xmlns:a16="http://schemas.microsoft.com/office/drawing/2014/main" id="{1E850552-444A-40A1-B44E-B13CB61E6CBC}"/>
+                <a16:creationId xmlns:a16="http://schemas.microsoft.com/office/drawing/2014/main" id="{F8D29440-9345-4ACF-A838-425BE26FDC44}"/>
               </a:ext>
             </a:extLst>
           </p:cNvPr>
@@ -10710,7 +10294,7 @@
           <p:cNvPr id="5" name="">
             <a:extLst xmlns:a="http://schemas.openxmlformats.org/drawingml/2006/main">
               <a:ext uri="{FF2B5EF4-FFF2-40B4-BE49-F238E27FC236}">
-                <a16:creationId xmlns:a16="http://schemas.microsoft.com/office/drawing/2014/main" id="{7D7A4455-9045-4411-A066-D364B0C3D9A5}"/>
+                <a16:creationId xmlns:a16="http://schemas.microsoft.com/office/drawing/2014/main" id="{0110A0D0-516C-4B38-8873-859AABA59469}"/>
               </a:ext>
             </a:extLst>
           </p:cNvPr>
@@ -10776,7 +10360,7 @@
           <p:cNvPr id="6" name="">
             <a:extLst xmlns:a="http://schemas.openxmlformats.org/drawingml/2006/main">
               <a:ext uri="{FF2B5EF4-FFF2-40B4-BE49-F238E27FC236}">
-                <a16:creationId xmlns:a16="http://schemas.microsoft.com/office/drawing/2014/main" id="{39088D57-5342-435C-AFF9-E679ABF90085}"/>
+                <a16:creationId xmlns:a16="http://schemas.microsoft.com/office/drawing/2014/main" id="{FA1FBDDE-4901-43EA-B1CA-66A7F39DF2F7}"/>
               </a:ext>
             </a:extLst>
           </p:cNvPr>
@@ -10865,7 +10449,7 @@
           <p:cNvPr id="7" name="">
             <a:extLst xmlns:a="http://schemas.openxmlformats.org/drawingml/2006/main">
               <a:ext uri="{FF2B5EF4-FFF2-40B4-BE49-F238E27FC236}">
-                <a16:creationId xmlns:a16="http://schemas.microsoft.com/office/drawing/2014/main" id="{0EB83AF6-1DCC-47AA-A26A-7D0CD06A72CC}"/>
+                <a16:creationId xmlns:a16="http://schemas.microsoft.com/office/drawing/2014/main" id="{6E8CB4DB-31A1-4040-AED8-82B813E650B8}"/>
               </a:ext>
             </a:extLst>
           </p:cNvPr>
@@ -10931,7 +10515,7 @@
           <p:cNvPr id="8" name="">
             <a:extLst xmlns:a="http://schemas.openxmlformats.org/drawingml/2006/main">
               <a:ext uri="{FF2B5EF4-FFF2-40B4-BE49-F238E27FC236}">
-                <a16:creationId xmlns:a16="http://schemas.microsoft.com/office/drawing/2014/main" id="{C64381D3-BE5F-4D4A-8534-DF064A10DE3D}"/>
+                <a16:creationId xmlns:a16="http://schemas.microsoft.com/office/drawing/2014/main" id="{BD7281DD-8FD1-422D-83D7-0906A9EC8B4C}"/>
               </a:ext>
             </a:extLst>
           </p:cNvPr>
@@ -11020,7 +10604,7 @@
           <p:cNvPr id="9" name="">
             <a:extLst xmlns:a="http://schemas.openxmlformats.org/drawingml/2006/main">
               <a:ext uri="{FF2B5EF4-FFF2-40B4-BE49-F238E27FC236}">
-                <a16:creationId xmlns:a16="http://schemas.microsoft.com/office/drawing/2014/main" id="{F4A61D08-14BC-47CC-8B2E-D9864605781F}"/>
+                <a16:creationId xmlns:a16="http://schemas.microsoft.com/office/drawing/2014/main" id="{7DFB180C-136D-40E7-8577-94663D204B85}"/>
               </a:ext>
             </a:extLst>
           </p:cNvPr>
@@ -11086,7 +10670,7 @@
           <p:cNvPr id="10" name="">
             <a:extLst xmlns:a="http://schemas.openxmlformats.org/drawingml/2006/main">
               <a:ext uri="{FF2B5EF4-FFF2-40B4-BE49-F238E27FC236}">
-                <a16:creationId xmlns:a16="http://schemas.microsoft.com/office/drawing/2014/main" id="{2C3681E8-909A-4D7A-B8D7-914F20D4F33E}"/>
+                <a16:creationId xmlns:a16="http://schemas.microsoft.com/office/drawing/2014/main" id="{1F9F42F6-16A2-4E08-A44D-2C1304DC9520}"/>
               </a:ext>
             </a:extLst>
           </p:cNvPr>
@@ -11175,7 +10759,7 @@
           <p:cNvPr id="11" name="">
             <a:extLst xmlns:a="http://schemas.openxmlformats.org/drawingml/2006/main">
               <a:ext uri="{FF2B5EF4-FFF2-40B4-BE49-F238E27FC236}">
-                <a16:creationId xmlns:a16="http://schemas.microsoft.com/office/drawing/2014/main" id="{8D94C697-2FD2-4EC9-A174-9DC6D5768C80}"/>
+                <a16:creationId xmlns:a16="http://schemas.microsoft.com/office/drawing/2014/main" id="{B2E152D4-E626-4A35-8A97-3CFCCFAE8447}"/>
               </a:ext>
             </a:extLst>
           </p:cNvPr>
@@ -11239,7 +10823,7 @@
     </p:spTree>
     <p:extLst>
       <p:ext uri="{BB962C8B-B14F-4D97-AF65-F5344CB8AC3E}">
-        <p14:creationId xmlns:p14="http://schemas.microsoft.com/office/powerpoint/2010/main" val="1980898798"/>
+        <p14:creationId xmlns:p14="http://schemas.microsoft.com/office/powerpoint/2010/main" val="1358299025"/>
       </p:ext>
     </p:extLst>
   </p:cSld>
